--- a/homework/UART_Loopback/project_note.pptx
+++ b/homework/UART_Loopback/project_note.pptx
@@ -4,11 +4,15 @@
   <p:sldMasterIdLst>
     <p:sldMasterId id="2147483648" r:id="rId1"/>
   </p:sldMasterIdLst>
+  <p:notesMasterIdLst>
+    <p:notesMasterId r:id="rId7"/>
+  </p:notesMasterIdLst>
   <p:sldIdLst>
-    <p:sldId id="256" r:id="rId2"/>
-    <p:sldId id="258" r:id="rId3"/>
-    <p:sldId id="260" r:id="rId4"/>
-    <p:sldId id="259" r:id="rId5"/>
+    <p:sldId id="259" r:id="rId2"/>
+    <p:sldId id="256" r:id="rId3"/>
+    <p:sldId id="258" r:id="rId4"/>
+    <p:sldId id="261" r:id="rId5"/>
+    <p:sldId id="260" r:id="rId6"/>
   </p:sldIdLst>
   <p:sldSz cx="12192000" cy="6858000"/>
   <p:notesSz cx="6858000" cy="9144000"/>
@@ -108,11 +112,457 @@
     </a:lvl9pPr>
   </p:defaultTextStyle>
   <p:extLst>
+    <p:ext uri="{521415D9-36F7-43E2-AB2F-B90AF26B5E84}">
+      <p14:sectionLst xmlns:p14="http://schemas.microsoft.com/office/powerpoint/2010/main">
+        <p14:section name="기본 구역" id="{4C0F669B-A783-4111-B7E2-395666C1812E}">
+          <p14:sldIdLst>
+            <p14:sldId id="259"/>
+            <p14:sldId id="256"/>
+            <p14:sldId id="258"/>
+            <p14:sldId id="261"/>
+            <p14:sldId id="260"/>
+          </p14:sldIdLst>
+        </p14:section>
+      </p14:sectionLst>
+    </p:ext>
     <p:ext uri="{EFAFB233-063F-42B5-8137-9DF3F51BA10A}">
       <p15:sldGuideLst xmlns:p15="http://schemas.microsoft.com/office/powerpoint/2012/main"/>
     </p:ext>
   </p:extLst>
 </p:presentation>
+</file>
+
+<file path=ppt/notesMasters/notesMaster1.xml><?xml version="1.0" encoding="utf-8"?>
+<p:notesMaster xmlns:a="http://schemas.openxmlformats.org/drawingml/2006/main" xmlns:r="http://schemas.openxmlformats.org/officeDocument/2006/relationships" xmlns:p="http://schemas.openxmlformats.org/presentationml/2006/main">
+  <p:cSld>
+    <p:bg>
+      <p:bgRef idx="1001">
+        <a:schemeClr val="bg1"/>
+      </p:bgRef>
+    </p:bg>
+    <p:spTree>
+      <p:nvGrpSpPr>
+        <p:cNvPr id="1" name=""/>
+        <p:cNvGrpSpPr/>
+        <p:nvPr/>
+      </p:nvGrpSpPr>
+      <p:grpSpPr>
+        <a:xfrm>
+          <a:off x="0" y="0"/>
+          <a:ext cx="0" cy="0"/>
+          <a:chOff x="0" y="0"/>
+          <a:chExt cx="0" cy="0"/>
+        </a:xfrm>
+      </p:grpSpPr>
+      <p:sp>
+        <p:nvSpPr>
+          <p:cNvPr id="2" name="머리글 개체 틀 1"/>
+          <p:cNvSpPr>
+            <a:spLocks noGrp="1"/>
+          </p:cNvSpPr>
+          <p:nvPr>
+            <p:ph type="hdr" sz="quarter"/>
+          </p:nvPr>
+        </p:nvSpPr>
+        <p:spPr>
+          <a:xfrm>
+            <a:off x="0" y="0"/>
+            <a:ext cx="2971800" cy="458788"/>
+          </a:xfrm>
+          <a:prstGeom prst="rect">
+            <a:avLst/>
+          </a:prstGeom>
+        </p:spPr>
+        <p:txBody>
+          <a:bodyPr vert="horz" lIns="91440" tIns="45720" rIns="91440" bIns="45720" rtlCol="0"/>
+          <a:lstStyle>
+            <a:lvl1pPr algn="l">
+              <a:defRPr sz="1200"/>
+            </a:lvl1pPr>
+          </a:lstStyle>
+          <a:p>
+            <a:endParaRPr lang="ko-KR" altLang="en-US"/>
+          </a:p>
+        </p:txBody>
+      </p:sp>
+      <p:sp>
+        <p:nvSpPr>
+          <p:cNvPr id="3" name="날짜 개체 틀 2"/>
+          <p:cNvSpPr>
+            <a:spLocks noGrp="1"/>
+          </p:cNvSpPr>
+          <p:nvPr>
+            <p:ph type="dt" idx="1"/>
+          </p:nvPr>
+        </p:nvSpPr>
+        <p:spPr>
+          <a:xfrm>
+            <a:off x="3884613" y="0"/>
+            <a:ext cx="2971800" cy="458788"/>
+          </a:xfrm>
+          <a:prstGeom prst="rect">
+            <a:avLst/>
+          </a:prstGeom>
+        </p:spPr>
+        <p:txBody>
+          <a:bodyPr vert="horz" lIns="91440" tIns="45720" rIns="91440" bIns="45720" rtlCol="0"/>
+          <a:lstStyle>
+            <a:lvl1pPr algn="r">
+              <a:defRPr sz="1200"/>
+            </a:lvl1pPr>
+          </a:lstStyle>
+          <a:p>
+            <a:fld id="{612C2D6F-211D-4EC9-9C42-CE182C85E136}" type="datetimeFigureOut">
+              <a:rPr lang="ko-KR" altLang="en-US" smtClean="0"/>
+              <a:t>2026-10-23</a:t>
+            </a:fld>
+            <a:endParaRPr lang="ko-KR" altLang="en-US"/>
+          </a:p>
+        </p:txBody>
+      </p:sp>
+      <p:sp>
+        <p:nvSpPr>
+          <p:cNvPr id="4" name="슬라이드 이미지 개체 틀 3"/>
+          <p:cNvSpPr>
+            <a:spLocks noGrp="1" noRot="1" noChangeAspect="1"/>
+          </p:cNvSpPr>
+          <p:nvPr>
+            <p:ph type="sldImg" idx="2"/>
+          </p:nvPr>
+        </p:nvSpPr>
+        <p:spPr>
+          <a:xfrm>
+            <a:off x="685800" y="1143000"/>
+            <a:ext cx="5486400" cy="3086100"/>
+          </a:xfrm>
+          <a:prstGeom prst="rect">
+            <a:avLst/>
+          </a:prstGeom>
+          <a:noFill/>
+          <a:ln w="12700">
+            <a:solidFill>
+              <a:prstClr val="black"/>
+            </a:solidFill>
+          </a:ln>
+        </p:spPr>
+        <p:txBody>
+          <a:bodyPr vert="horz" lIns="91440" tIns="45720" rIns="91440" bIns="45720" rtlCol="0" anchor="ctr"/>
+          <a:lstStyle/>
+          <a:p>
+            <a:endParaRPr lang="ko-KR" altLang="en-US"/>
+          </a:p>
+        </p:txBody>
+      </p:sp>
+      <p:sp>
+        <p:nvSpPr>
+          <p:cNvPr id="5" name="슬라이드 노트 개체 틀 4"/>
+          <p:cNvSpPr>
+            <a:spLocks noGrp="1"/>
+          </p:cNvSpPr>
+          <p:nvPr>
+            <p:ph type="body" sz="quarter" idx="3"/>
+          </p:nvPr>
+        </p:nvSpPr>
+        <p:spPr>
+          <a:xfrm>
+            <a:off x="685800" y="4400550"/>
+            <a:ext cx="5486400" cy="3600450"/>
+          </a:xfrm>
+          <a:prstGeom prst="rect">
+            <a:avLst/>
+          </a:prstGeom>
+        </p:spPr>
+        <p:txBody>
+          <a:bodyPr vert="horz" lIns="91440" tIns="45720" rIns="91440" bIns="45720" rtlCol="0"/>
+          <a:lstStyle/>
+          <a:p>
+            <a:pPr lvl="0"/>
+            <a:r>
+              <a:rPr lang="ko-KR" altLang="en-US"/>
+              <a:t>마스터 텍스트 스타일을 편집하려면 클릭</a:t>
+            </a:r>
+          </a:p>
+          <a:p>
+            <a:pPr lvl="1"/>
+            <a:r>
+              <a:rPr lang="ko-KR" altLang="en-US"/>
+              <a:t>두 번째 수준</a:t>
+            </a:r>
+          </a:p>
+          <a:p>
+            <a:pPr lvl="2"/>
+            <a:r>
+              <a:rPr lang="ko-KR" altLang="en-US"/>
+              <a:t>세 번째 수준</a:t>
+            </a:r>
+          </a:p>
+          <a:p>
+            <a:pPr lvl="3"/>
+            <a:r>
+              <a:rPr lang="ko-KR" altLang="en-US"/>
+              <a:t>네 번째 수준</a:t>
+            </a:r>
+          </a:p>
+          <a:p>
+            <a:pPr lvl="4"/>
+            <a:r>
+              <a:rPr lang="ko-KR" altLang="en-US"/>
+              <a:t>다섯 번째 수준</a:t>
+            </a:r>
+          </a:p>
+        </p:txBody>
+      </p:sp>
+      <p:sp>
+        <p:nvSpPr>
+          <p:cNvPr id="6" name="바닥글 개체 틀 5"/>
+          <p:cNvSpPr>
+            <a:spLocks noGrp="1"/>
+          </p:cNvSpPr>
+          <p:nvPr>
+            <p:ph type="ftr" sz="quarter" idx="4"/>
+          </p:nvPr>
+        </p:nvSpPr>
+        <p:spPr>
+          <a:xfrm>
+            <a:off x="0" y="8685213"/>
+            <a:ext cx="2971800" cy="458787"/>
+          </a:xfrm>
+          <a:prstGeom prst="rect">
+            <a:avLst/>
+          </a:prstGeom>
+        </p:spPr>
+        <p:txBody>
+          <a:bodyPr vert="horz" lIns="91440" tIns="45720" rIns="91440" bIns="45720" rtlCol="0" anchor="b"/>
+          <a:lstStyle>
+            <a:lvl1pPr algn="l">
+              <a:defRPr sz="1200"/>
+            </a:lvl1pPr>
+          </a:lstStyle>
+          <a:p>
+            <a:endParaRPr lang="ko-KR" altLang="en-US"/>
+          </a:p>
+        </p:txBody>
+      </p:sp>
+      <p:sp>
+        <p:nvSpPr>
+          <p:cNvPr id="7" name="슬라이드 번호 개체 틀 6"/>
+          <p:cNvSpPr>
+            <a:spLocks noGrp="1"/>
+          </p:cNvSpPr>
+          <p:nvPr>
+            <p:ph type="sldNum" sz="quarter" idx="5"/>
+          </p:nvPr>
+        </p:nvSpPr>
+        <p:spPr>
+          <a:xfrm>
+            <a:off x="3884613" y="8685213"/>
+            <a:ext cx="2971800" cy="458787"/>
+          </a:xfrm>
+          <a:prstGeom prst="rect">
+            <a:avLst/>
+          </a:prstGeom>
+        </p:spPr>
+        <p:txBody>
+          <a:bodyPr vert="horz" lIns="91440" tIns="45720" rIns="91440" bIns="45720" rtlCol="0" anchor="b"/>
+          <a:lstStyle>
+            <a:lvl1pPr algn="r">
+              <a:defRPr sz="1200"/>
+            </a:lvl1pPr>
+          </a:lstStyle>
+          <a:p>
+            <a:fld id="{F078D1BA-79A0-423B-AA11-204BA31DFD1A}" type="slidenum">
+              <a:rPr lang="ko-KR" altLang="en-US" smtClean="0"/>
+              <a:t>‹#›</a:t>
+            </a:fld>
+            <a:endParaRPr lang="ko-KR" altLang="en-US"/>
+          </a:p>
+        </p:txBody>
+      </p:sp>
+    </p:spTree>
+    <p:extLst>
+      <p:ext uri="{BB962C8B-B14F-4D97-AF65-F5344CB8AC3E}">
+        <p14:creationId xmlns:p14="http://schemas.microsoft.com/office/powerpoint/2010/main" val="4172935557"/>
+      </p:ext>
+    </p:extLst>
+  </p:cSld>
+  <p:clrMap bg1="lt1" tx1="dk1" bg2="lt2" tx2="dk2" accent1="accent1" accent2="accent2" accent3="accent3" accent4="accent4" accent5="accent5" accent6="accent6" hlink="hlink" folHlink="folHlink"/>
+  <p:notesStyle>
+    <a:lvl1pPr marL="0" algn="l" defTabSz="914400" rtl="0" eaLnBrk="1" latinLnBrk="1" hangingPunct="1">
+      <a:defRPr sz="1200" kern="1200">
+        <a:solidFill>
+          <a:schemeClr val="tx1"/>
+        </a:solidFill>
+        <a:latin typeface="+mn-lt"/>
+        <a:ea typeface="+mn-ea"/>
+        <a:cs typeface="+mn-cs"/>
+      </a:defRPr>
+    </a:lvl1pPr>
+    <a:lvl2pPr marL="457200" algn="l" defTabSz="914400" rtl="0" eaLnBrk="1" latinLnBrk="1" hangingPunct="1">
+      <a:defRPr sz="1200" kern="1200">
+        <a:solidFill>
+          <a:schemeClr val="tx1"/>
+        </a:solidFill>
+        <a:latin typeface="+mn-lt"/>
+        <a:ea typeface="+mn-ea"/>
+        <a:cs typeface="+mn-cs"/>
+      </a:defRPr>
+    </a:lvl2pPr>
+    <a:lvl3pPr marL="914400" algn="l" defTabSz="914400" rtl="0" eaLnBrk="1" latinLnBrk="1" hangingPunct="1">
+      <a:defRPr sz="1200" kern="1200">
+        <a:solidFill>
+          <a:schemeClr val="tx1"/>
+        </a:solidFill>
+        <a:latin typeface="+mn-lt"/>
+        <a:ea typeface="+mn-ea"/>
+        <a:cs typeface="+mn-cs"/>
+      </a:defRPr>
+    </a:lvl3pPr>
+    <a:lvl4pPr marL="1371600" algn="l" defTabSz="914400" rtl="0" eaLnBrk="1" latinLnBrk="1" hangingPunct="1">
+      <a:defRPr sz="1200" kern="1200">
+        <a:solidFill>
+          <a:schemeClr val="tx1"/>
+        </a:solidFill>
+        <a:latin typeface="+mn-lt"/>
+        <a:ea typeface="+mn-ea"/>
+        <a:cs typeface="+mn-cs"/>
+      </a:defRPr>
+    </a:lvl4pPr>
+    <a:lvl5pPr marL="1828800" algn="l" defTabSz="914400" rtl="0" eaLnBrk="1" latinLnBrk="1" hangingPunct="1">
+      <a:defRPr sz="1200" kern="1200">
+        <a:solidFill>
+          <a:schemeClr val="tx1"/>
+        </a:solidFill>
+        <a:latin typeface="+mn-lt"/>
+        <a:ea typeface="+mn-ea"/>
+        <a:cs typeface="+mn-cs"/>
+      </a:defRPr>
+    </a:lvl5pPr>
+    <a:lvl6pPr marL="2286000" algn="l" defTabSz="914400" rtl="0" eaLnBrk="1" latinLnBrk="1" hangingPunct="1">
+      <a:defRPr sz="1200" kern="1200">
+        <a:solidFill>
+          <a:schemeClr val="tx1"/>
+        </a:solidFill>
+        <a:latin typeface="+mn-lt"/>
+        <a:ea typeface="+mn-ea"/>
+        <a:cs typeface="+mn-cs"/>
+      </a:defRPr>
+    </a:lvl6pPr>
+    <a:lvl7pPr marL="2743200" algn="l" defTabSz="914400" rtl="0" eaLnBrk="1" latinLnBrk="1" hangingPunct="1">
+      <a:defRPr sz="1200" kern="1200">
+        <a:solidFill>
+          <a:schemeClr val="tx1"/>
+        </a:solidFill>
+        <a:latin typeface="+mn-lt"/>
+        <a:ea typeface="+mn-ea"/>
+        <a:cs typeface="+mn-cs"/>
+      </a:defRPr>
+    </a:lvl7pPr>
+    <a:lvl8pPr marL="3200400" algn="l" defTabSz="914400" rtl="0" eaLnBrk="1" latinLnBrk="1" hangingPunct="1">
+      <a:defRPr sz="1200" kern="1200">
+        <a:solidFill>
+          <a:schemeClr val="tx1"/>
+        </a:solidFill>
+        <a:latin typeface="+mn-lt"/>
+        <a:ea typeface="+mn-ea"/>
+        <a:cs typeface="+mn-cs"/>
+      </a:defRPr>
+    </a:lvl8pPr>
+    <a:lvl9pPr marL="3657600" algn="l" defTabSz="914400" rtl="0" eaLnBrk="1" latinLnBrk="1" hangingPunct="1">
+      <a:defRPr sz="1200" kern="1200">
+        <a:solidFill>
+          <a:schemeClr val="tx1"/>
+        </a:solidFill>
+        <a:latin typeface="+mn-lt"/>
+        <a:ea typeface="+mn-ea"/>
+        <a:cs typeface="+mn-cs"/>
+      </a:defRPr>
+    </a:lvl9pPr>
+  </p:notesStyle>
+</p:notesMaster>
+</file>
+
+<file path=ppt/notesSlides/notesSlide1.xml><?xml version="1.0" encoding="utf-8"?>
+<p:notes xmlns:a="http://schemas.openxmlformats.org/drawingml/2006/main" xmlns:r="http://schemas.openxmlformats.org/officeDocument/2006/relationships" xmlns:p="http://schemas.openxmlformats.org/presentationml/2006/main">
+  <p:cSld>
+    <p:spTree>
+      <p:nvGrpSpPr>
+        <p:cNvPr id="1" name=""/>
+        <p:cNvGrpSpPr/>
+        <p:nvPr/>
+      </p:nvGrpSpPr>
+      <p:grpSpPr>
+        <a:xfrm>
+          <a:off x="0" y="0"/>
+          <a:ext cx="0" cy="0"/>
+          <a:chOff x="0" y="0"/>
+          <a:chExt cx="0" cy="0"/>
+        </a:xfrm>
+      </p:grpSpPr>
+      <p:sp>
+        <p:nvSpPr>
+          <p:cNvPr id="2" name="슬라이드 이미지 개체 틀 1"/>
+          <p:cNvSpPr>
+            <a:spLocks noGrp="1" noRot="1" noChangeAspect="1"/>
+          </p:cNvSpPr>
+          <p:nvPr>
+            <p:ph type="sldImg"/>
+          </p:nvPr>
+        </p:nvSpPr>
+        <p:spPr/>
+      </p:sp>
+      <p:sp>
+        <p:nvSpPr>
+          <p:cNvPr id="3" name="슬라이드 노트 개체 틀 2"/>
+          <p:cNvSpPr>
+            <a:spLocks noGrp="1"/>
+          </p:cNvSpPr>
+          <p:nvPr>
+            <p:ph type="body" idx="1"/>
+          </p:nvPr>
+        </p:nvSpPr>
+        <p:spPr/>
+        <p:txBody>
+          <a:bodyPr/>
+          <a:lstStyle/>
+          <a:p>
+            <a:endParaRPr lang="ko-KR" altLang="en-US"/>
+          </a:p>
+        </p:txBody>
+      </p:sp>
+      <p:sp>
+        <p:nvSpPr>
+          <p:cNvPr id="4" name="슬라이드 번호 개체 틀 3"/>
+          <p:cNvSpPr>
+            <a:spLocks noGrp="1"/>
+          </p:cNvSpPr>
+          <p:nvPr>
+            <p:ph type="sldNum" sz="quarter" idx="5"/>
+          </p:nvPr>
+        </p:nvSpPr>
+        <p:spPr/>
+        <p:txBody>
+          <a:bodyPr/>
+          <a:lstStyle/>
+          <a:p>
+            <a:fld id="{F078D1BA-79A0-423B-AA11-204BA31DFD1A}" type="slidenum">
+              <a:rPr lang="ko-KR" altLang="en-US" smtClean="0"/>
+              <a:t>4</a:t>
+            </a:fld>
+            <a:endParaRPr lang="ko-KR" altLang="en-US"/>
+          </a:p>
+        </p:txBody>
+      </p:sp>
+    </p:spTree>
+    <p:extLst>
+      <p:ext uri="{BB962C8B-B14F-4D97-AF65-F5344CB8AC3E}">
+        <p14:creationId xmlns:p14="http://schemas.microsoft.com/office/powerpoint/2010/main" val="151152310"/>
+      </p:ext>
+    </p:extLst>
+  </p:cSld>
+  <p:clrMapOvr>
+    <a:masterClrMapping/>
+  </p:clrMapOvr>
+</p:notes>
 </file>
 
 <file path=ppt/slideLayouts/slideLayout1.xml><?xml version="1.0" encoding="utf-8"?>
@@ -262,7 +712,7 @@
           <a:p>
             <a:fld id="{B73B9D2D-187D-4A44-9A6D-07D40FEF3BF6}" type="datetimeFigureOut">
               <a:rPr lang="ko-KR" altLang="en-US" smtClean="0"/>
-              <a:t>2026-10-22</a:t>
+              <a:t>2026-10-23</a:t>
             </a:fld>
             <a:endParaRPr lang="ko-KR" altLang="en-US"/>
           </a:p>
@@ -460,7 +910,7 @@
           <a:p>
             <a:fld id="{B73B9D2D-187D-4A44-9A6D-07D40FEF3BF6}" type="datetimeFigureOut">
               <a:rPr lang="ko-KR" altLang="en-US" smtClean="0"/>
-              <a:t>2026-10-22</a:t>
+              <a:t>2026-10-23</a:t>
             </a:fld>
             <a:endParaRPr lang="ko-KR" altLang="en-US"/>
           </a:p>
@@ -668,7 +1118,7 @@
           <a:p>
             <a:fld id="{B73B9D2D-187D-4A44-9A6D-07D40FEF3BF6}" type="datetimeFigureOut">
               <a:rPr lang="ko-KR" altLang="en-US" smtClean="0"/>
-              <a:t>2026-10-22</a:t>
+              <a:t>2026-10-23</a:t>
             </a:fld>
             <a:endParaRPr lang="ko-KR" altLang="en-US"/>
           </a:p>
@@ -866,7 +1316,7 @@
           <a:p>
             <a:fld id="{B73B9D2D-187D-4A44-9A6D-07D40FEF3BF6}" type="datetimeFigureOut">
               <a:rPr lang="ko-KR" altLang="en-US" smtClean="0"/>
-              <a:t>2026-10-22</a:t>
+              <a:t>2026-10-23</a:t>
             </a:fld>
             <a:endParaRPr lang="ko-KR" altLang="en-US"/>
           </a:p>
@@ -1141,7 +1591,7 @@
           <a:p>
             <a:fld id="{B73B9D2D-187D-4A44-9A6D-07D40FEF3BF6}" type="datetimeFigureOut">
               <a:rPr lang="ko-KR" altLang="en-US" smtClean="0"/>
-              <a:t>2026-10-22</a:t>
+              <a:t>2026-10-23</a:t>
             </a:fld>
             <a:endParaRPr lang="ko-KR" altLang="en-US"/>
           </a:p>
@@ -1406,7 +1856,7 @@
           <a:p>
             <a:fld id="{B73B9D2D-187D-4A44-9A6D-07D40FEF3BF6}" type="datetimeFigureOut">
               <a:rPr lang="ko-KR" altLang="en-US" smtClean="0"/>
-              <a:t>2026-10-22</a:t>
+              <a:t>2026-10-23</a:t>
             </a:fld>
             <a:endParaRPr lang="ko-KR" altLang="en-US"/>
           </a:p>
@@ -1818,7 +2268,7 @@
           <a:p>
             <a:fld id="{B73B9D2D-187D-4A44-9A6D-07D40FEF3BF6}" type="datetimeFigureOut">
               <a:rPr lang="ko-KR" altLang="en-US" smtClean="0"/>
-              <a:t>2026-10-22</a:t>
+              <a:t>2026-10-23</a:t>
             </a:fld>
             <a:endParaRPr lang="ko-KR" altLang="en-US"/>
           </a:p>
@@ -1959,7 +2409,7 @@
           <a:p>
             <a:fld id="{B73B9D2D-187D-4A44-9A6D-07D40FEF3BF6}" type="datetimeFigureOut">
               <a:rPr lang="ko-KR" altLang="en-US" smtClean="0"/>
-              <a:t>2026-10-22</a:t>
+              <a:t>2026-10-23</a:t>
             </a:fld>
             <a:endParaRPr lang="ko-KR" altLang="en-US"/>
           </a:p>
@@ -2072,7 +2522,7 @@
           <a:p>
             <a:fld id="{B73B9D2D-187D-4A44-9A6D-07D40FEF3BF6}" type="datetimeFigureOut">
               <a:rPr lang="ko-KR" altLang="en-US" smtClean="0"/>
-              <a:t>2026-10-22</a:t>
+              <a:t>2026-10-23</a:t>
             </a:fld>
             <a:endParaRPr lang="ko-KR" altLang="en-US"/>
           </a:p>
@@ -2383,7 +2833,7 @@
           <a:p>
             <a:fld id="{B73B9D2D-187D-4A44-9A6D-07D40FEF3BF6}" type="datetimeFigureOut">
               <a:rPr lang="ko-KR" altLang="en-US" smtClean="0"/>
-              <a:t>2026-10-22</a:t>
+              <a:t>2026-10-23</a:t>
             </a:fld>
             <a:endParaRPr lang="ko-KR" altLang="en-US"/>
           </a:p>
@@ -2671,7 +3121,7 @@
           <a:p>
             <a:fld id="{B73B9D2D-187D-4A44-9A6D-07D40FEF3BF6}" type="datetimeFigureOut">
               <a:rPr lang="ko-KR" altLang="en-US" smtClean="0"/>
-              <a:t>2026-10-22</a:t>
+              <a:t>2026-10-23</a:t>
             </a:fld>
             <a:endParaRPr lang="ko-KR" altLang="en-US"/>
           </a:p>
@@ -2912,7 +3362,7 @@
           <a:p>
             <a:fld id="{B73B9D2D-187D-4A44-9A6D-07D40FEF3BF6}" type="datetimeFigureOut">
               <a:rPr lang="ko-KR" altLang="en-US" smtClean="0"/>
-              <a:t>2026-10-22</a:t>
+              <a:t>2026-10-23</a:t>
             </a:fld>
             <a:endParaRPr lang="ko-KR" altLang="en-US"/>
           </a:p>
@@ -3313,6 +3763,171 @@
 </file>
 
 <file path=ppt/slides/slide1.xml><?xml version="1.0" encoding="utf-8"?>
+<p:sld xmlns:a="http://schemas.openxmlformats.org/drawingml/2006/main" xmlns:r="http://schemas.openxmlformats.org/officeDocument/2006/relationships" xmlns:p="http://schemas.openxmlformats.org/presentationml/2006/main">
+  <p:cSld>
+    <p:spTree>
+      <p:nvGrpSpPr>
+        <p:cNvPr id="1" name=""/>
+        <p:cNvGrpSpPr/>
+        <p:nvPr/>
+      </p:nvGrpSpPr>
+      <p:grpSpPr>
+        <a:xfrm>
+          <a:off x="0" y="0"/>
+          <a:ext cx="0" cy="0"/>
+          <a:chOff x="0" y="0"/>
+          <a:chExt cx="0" cy="0"/>
+        </a:xfrm>
+      </p:grpSpPr>
+      <p:sp>
+        <p:nvSpPr>
+          <p:cNvPr id="5" name="TextBox 4">
+            <a:extLst>
+              <a:ext uri="{FF2B5EF4-FFF2-40B4-BE49-F238E27FC236}">
+                <a16:creationId xmlns:a16="http://schemas.microsoft.com/office/drawing/2014/main" id="{D1553A74-9C1E-02CB-5BFA-32A2D678C04A}"/>
+              </a:ext>
+            </a:extLst>
+          </p:cNvPr>
+          <p:cNvSpPr txBox="1"/>
+          <p:nvPr/>
+        </p:nvSpPr>
+        <p:spPr>
+          <a:xfrm>
+            <a:off x="134221" y="112433"/>
+            <a:ext cx="9489859" cy="4524315"/>
+          </a:xfrm>
+          <a:prstGeom prst="rect">
+            <a:avLst/>
+          </a:prstGeom>
+          <a:noFill/>
+        </p:spPr>
+        <p:txBody>
+          <a:bodyPr wrap="square" rtlCol="0">
+            <a:spAutoFit/>
+          </a:bodyPr>
+          <a:lstStyle/>
+          <a:p>
+            <a:r>
+              <a:rPr lang="ko-KR" altLang="ko-KR"/>
+              <a:t>HW uart_loopback 시뮬레이션, 및 동작 설명</a:t>
+            </a:r>
+            <a:endParaRPr lang="en-US" altLang="ko-KR"/>
+          </a:p>
+          <a:p>
+            <a:endParaRPr lang="en-US" altLang="ko-KR"/>
+          </a:p>
+          <a:p>
+            <a:r>
+              <a:rPr lang="en-US" altLang="ko-KR"/>
+              <a:t>1. </a:t>
+            </a:r>
+            <a:r>
+              <a:rPr lang="ko-KR" altLang="en-US"/>
+              <a:t>목적</a:t>
+            </a:r>
+            <a:endParaRPr lang="en-US" altLang="ko-KR"/>
+          </a:p>
+          <a:p>
+            <a:pPr marL="342900" indent="-342900">
+              <a:buAutoNum type="arabicPeriod"/>
+            </a:pPr>
+            <a:endParaRPr lang="en-US" altLang="ko-KR"/>
+          </a:p>
+          <a:p>
+            <a:endParaRPr lang="en-US" altLang="ko-KR"/>
+          </a:p>
+          <a:p>
+            <a:r>
+              <a:rPr lang="en-US" altLang="ko-KR"/>
+              <a:t>2. </a:t>
+            </a:r>
+            <a:r>
+              <a:rPr lang="ko-KR" altLang="en-US"/>
+              <a:t>블록 다이어그램</a:t>
+            </a:r>
+            <a:endParaRPr lang="en-US" altLang="ko-KR"/>
+          </a:p>
+          <a:p>
+            <a:endParaRPr lang="en-US" altLang="ko-KR"/>
+          </a:p>
+          <a:p>
+            <a:endParaRPr lang="en-US" altLang="ko-KR"/>
+          </a:p>
+          <a:p>
+            <a:r>
+              <a:rPr lang="en-US" altLang="ko-KR"/>
+              <a:t>3.</a:t>
+            </a:r>
+            <a:r>
+              <a:rPr lang="ko-KR" altLang="en-US"/>
+              <a:t> </a:t>
+            </a:r>
+            <a:r>
+              <a:rPr lang="en-US" altLang="ko-KR"/>
+              <a:t>ASM </a:t>
+            </a:r>
+            <a:r>
+              <a:rPr lang="ko-KR" altLang="en-US"/>
+              <a:t>차트 </a:t>
+            </a:r>
+            <a:endParaRPr lang="en-US" altLang="ko-KR"/>
+          </a:p>
+          <a:p>
+            <a:endParaRPr lang="en-US" altLang="ko-KR"/>
+          </a:p>
+          <a:p>
+            <a:endParaRPr lang="en-US" altLang="ko-KR"/>
+          </a:p>
+          <a:p>
+            <a:r>
+              <a:rPr lang="en-US" altLang="ko-KR"/>
+              <a:t>4. </a:t>
+            </a:r>
+            <a:r>
+              <a:rPr lang="ko-KR" altLang="en-US"/>
+              <a:t>시뮬레이션</a:t>
+            </a:r>
+            <a:endParaRPr lang="en-US" altLang="ko-KR"/>
+          </a:p>
+          <a:p>
+            <a:pPr marL="342900" indent="-342900">
+              <a:buAutoNum type="arabicPeriod"/>
+            </a:pPr>
+            <a:endParaRPr lang="en-US" altLang="ko-KR"/>
+          </a:p>
+          <a:p>
+            <a:endParaRPr lang="en-US" altLang="ko-KR"/>
+          </a:p>
+          <a:p>
+            <a:r>
+              <a:rPr lang="en-US" altLang="ko-KR"/>
+              <a:t>5.</a:t>
+            </a:r>
+            <a:r>
+              <a:rPr lang="ko-KR" altLang="en-US"/>
+              <a:t> 결론 및 고찰 </a:t>
+            </a:r>
+            <a:endParaRPr lang="ko-KR" altLang="ko-KR"/>
+          </a:p>
+          <a:p>
+            <a:endParaRPr lang="en-US" altLang="ko-KR"/>
+          </a:p>
+        </p:txBody>
+      </p:sp>
+    </p:spTree>
+    <p:extLst>
+      <p:ext uri="{BB962C8B-B14F-4D97-AF65-F5344CB8AC3E}">
+        <p14:creationId xmlns:p14="http://schemas.microsoft.com/office/powerpoint/2010/main" val="1488245124"/>
+      </p:ext>
+    </p:extLst>
+  </p:cSld>
+  <p:clrMapOvr>
+    <a:masterClrMapping/>
+  </p:clrMapOvr>
+</p:sld>
+</file>
+
+<file path=ppt/slides/slide2.xml><?xml version="1.0" encoding="utf-8"?>
 <p:sld xmlns:a="http://schemas.openxmlformats.org/drawingml/2006/main" xmlns:r="http://schemas.openxmlformats.org/officeDocument/2006/relationships" xmlns:p="http://schemas.openxmlformats.org/presentationml/2006/main">
   <p:cSld>
     <p:spTree>
@@ -5005,7 +5620,7 @@
 </p:sld>
 </file>
 
-<file path=ppt/slides/slide2.xml><?xml version="1.0" encoding="utf-8"?>
+<file path=ppt/slides/slide3.xml><?xml version="1.0" encoding="utf-8"?>
 <p:sld xmlns:a="http://schemas.openxmlformats.org/drawingml/2006/main" xmlns:r="http://schemas.openxmlformats.org/officeDocument/2006/relationships" xmlns:p="http://schemas.openxmlformats.org/presentationml/2006/main">
   <p:cSld>
     <p:spTree>
@@ -7534,7 +8149,2075 @@
 </p:sld>
 </file>
 
-<file path=ppt/slides/slide3.xml><?xml version="1.0" encoding="utf-8"?>
+<file path=ppt/slides/slide4.xml><?xml version="1.0" encoding="utf-8"?>
+<p:sld xmlns:a="http://schemas.openxmlformats.org/drawingml/2006/main" xmlns:r="http://schemas.openxmlformats.org/officeDocument/2006/relationships" xmlns:p="http://schemas.openxmlformats.org/presentationml/2006/main">
+  <p:cSld>
+    <p:spTree>
+      <p:nvGrpSpPr>
+        <p:cNvPr id="1" name="">
+          <a:extLst>
+            <a:ext uri="{FF2B5EF4-FFF2-40B4-BE49-F238E27FC236}">
+              <a16:creationId xmlns:a16="http://schemas.microsoft.com/office/drawing/2014/main" id="{162C5F3B-4F31-B2CB-8984-7392C39D38A2}"/>
+            </a:ext>
+          </a:extLst>
+        </p:cNvPr>
+        <p:cNvGrpSpPr/>
+        <p:nvPr/>
+      </p:nvGrpSpPr>
+      <p:grpSpPr>
+        <a:xfrm>
+          <a:off x="0" y="0"/>
+          <a:ext cx="0" cy="0"/>
+          <a:chOff x="0" y="0"/>
+          <a:chExt cx="0" cy="0"/>
+        </a:xfrm>
+      </p:grpSpPr>
+      <p:sp>
+        <p:nvSpPr>
+          <p:cNvPr id="7" name="TextBox 6">
+            <a:extLst>
+              <a:ext uri="{FF2B5EF4-FFF2-40B4-BE49-F238E27FC236}">
+                <a16:creationId xmlns:a16="http://schemas.microsoft.com/office/drawing/2014/main" id="{11C6CD11-9D6F-BC44-57BB-0CDB1898B8F5}"/>
+              </a:ext>
+            </a:extLst>
+          </p:cNvPr>
+          <p:cNvSpPr txBox="1"/>
+          <p:nvPr/>
+        </p:nvSpPr>
+        <p:spPr>
+          <a:xfrm>
+            <a:off x="184227" y="133864"/>
+            <a:ext cx="9489859" cy="923330"/>
+          </a:xfrm>
+          <a:prstGeom prst="rect">
+            <a:avLst/>
+          </a:prstGeom>
+          <a:noFill/>
+        </p:spPr>
+        <p:txBody>
+          <a:bodyPr wrap="square" rtlCol="0">
+            <a:spAutoFit/>
+          </a:bodyPr>
+          <a:lstStyle/>
+          <a:p>
+            <a:r>
+              <a:rPr lang="en-US" altLang="ko-KR"/>
+              <a:t>Tx </a:t>
+            </a:r>
+            <a:r>
+              <a:rPr lang="ko-KR" altLang="en-US"/>
+              <a:t>동작 확인</a:t>
+            </a:r>
+            <a:endParaRPr lang="en-US" altLang="ko-KR"/>
+          </a:p>
+          <a:p>
+            <a:r>
+              <a:rPr lang="ko-KR" altLang="en-US"/>
+              <a:t>확인 부분 </a:t>
+            </a:r>
+            <a:r>
+              <a:rPr lang="en-US" altLang="ko-KR"/>
+              <a:t>– </a:t>
+            </a:r>
+            <a:r>
+              <a:rPr lang="ko-KR" altLang="en-US"/>
+              <a:t>전체 </a:t>
+            </a:r>
+            <a:r>
+              <a:rPr lang="en-US" altLang="ko-KR"/>
+              <a:t>TX </a:t>
+            </a:r>
+            <a:r>
+              <a:rPr lang="ko-KR" altLang="en-US"/>
+              <a:t>동작 </a:t>
+            </a:r>
+            <a:r>
+              <a:rPr lang="en-US" altLang="ko-KR"/>
+              <a:t>FLOW</a:t>
+            </a:r>
+            <a:r>
+              <a:rPr lang="ko-KR" altLang="en-US"/>
+              <a:t> </a:t>
+            </a:r>
+            <a:endParaRPr lang="en-US" altLang="ko-KR"/>
+          </a:p>
+          <a:p>
+            <a:endParaRPr lang="en-US" altLang="ko-KR"/>
+          </a:p>
+        </p:txBody>
+      </p:sp>
+      <p:sp>
+        <p:nvSpPr>
+          <p:cNvPr id="24" name="TextBox 23">
+            <a:extLst>
+              <a:ext uri="{FF2B5EF4-FFF2-40B4-BE49-F238E27FC236}">
+                <a16:creationId xmlns:a16="http://schemas.microsoft.com/office/drawing/2014/main" id="{7501D188-34BE-E3DA-FD54-5B49B15CA813}"/>
+              </a:ext>
+            </a:extLst>
+          </p:cNvPr>
+          <p:cNvSpPr txBox="1"/>
+          <p:nvPr/>
+        </p:nvSpPr>
+        <p:spPr>
+          <a:xfrm>
+            <a:off x="1021860" y="914037"/>
+            <a:ext cx="266420" cy="369332"/>
+          </a:xfrm>
+          <a:prstGeom prst="rect">
+            <a:avLst/>
+          </a:prstGeom>
+          <a:noFill/>
+        </p:spPr>
+        <p:txBody>
+          <a:bodyPr wrap="none" rtlCol="0">
+            <a:spAutoFit/>
+          </a:bodyPr>
+          <a:lstStyle/>
+          <a:p>
+            <a:r>
+              <a:rPr lang="en-US" altLang="ko-KR"/>
+              <a:t> </a:t>
+            </a:r>
+            <a:endParaRPr lang="ko-KR" altLang="en-US"/>
+          </a:p>
+        </p:txBody>
+      </p:sp>
+      <p:grpSp>
+        <p:nvGrpSpPr>
+          <p:cNvPr id="60" name="그룹 59">
+            <a:extLst>
+              <a:ext uri="{FF2B5EF4-FFF2-40B4-BE49-F238E27FC236}">
+                <a16:creationId xmlns:a16="http://schemas.microsoft.com/office/drawing/2014/main" id="{7D4EAA55-F71F-330E-71E9-B6E3CD522511}"/>
+              </a:ext>
+            </a:extLst>
+          </p:cNvPr>
+          <p:cNvGrpSpPr/>
+          <p:nvPr/>
+        </p:nvGrpSpPr>
+        <p:grpSpPr>
+          <a:xfrm>
+            <a:off x="1298628" y="2155148"/>
+            <a:ext cx="8832763" cy="3555406"/>
+            <a:chOff x="1098046" y="1498603"/>
+            <a:chExt cx="9714121" cy="3860794"/>
+          </a:xfrm>
+        </p:grpSpPr>
+        <p:grpSp>
+          <p:nvGrpSpPr>
+            <p:cNvPr id="16" name="그룹 15">
+              <a:extLst>
+                <a:ext uri="{FF2B5EF4-FFF2-40B4-BE49-F238E27FC236}">
+                  <a16:creationId xmlns:a16="http://schemas.microsoft.com/office/drawing/2014/main" id="{DD2EF9CF-A709-7624-F083-51693E5565B3}"/>
+                </a:ext>
+              </a:extLst>
+            </p:cNvPr>
+            <p:cNvGrpSpPr/>
+            <p:nvPr/>
+          </p:nvGrpSpPr>
+          <p:grpSpPr>
+            <a:xfrm>
+              <a:off x="1098046" y="1498603"/>
+              <a:ext cx="9714121" cy="3860794"/>
+              <a:chOff x="851485" y="1464469"/>
+              <a:chExt cx="9714121" cy="3860794"/>
+            </a:xfrm>
+          </p:grpSpPr>
+          <p:pic>
+            <p:nvPicPr>
+              <p:cNvPr id="13" name="그림 12">
+                <a:extLst>
+                  <a:ext uri="{FF2B5EF4-FFF2-40B4-BE49-F238E27FC236}">
+                    <a16:creationId xmlns:a16="http://schemas.microsoft.com/office/drawing/2014/main" id="{41C5B4DC-5EA2-D202-A077-B1FB0AD93422}"/>
+                  </a:ext>
+                </a:extLst>
+              </p:cNvPr>
+              <p:cNvPicPr>
+                <a:picLocks noChangeAspect="1"/>
+              </p:cNvPicPr>
+              <p:nvPr/>
+            </p:nvPicPr>
+            <p:blipFill>
+              <a:blip r:embed="rId3"/>
+              <a:stretch>
+                <a:fillRect/>
+              </a:stretch>
+            </p:blipFill>
+            <p:spPr>
+              <a:xfrm>
+                <a:off x="851485" y="1464469"/>
+                <a:ext cx="9714121" cy="3860794"/>
+              </a:xfrm>
+              <a:prstGeom prst="rect">
+                <a:avLst/>
+              </a:prstGeom>
+            </p:spPr>
+          </p:pic>
+          <p:sp>
+            <p:nvSpPr>
+              <p:cNvPr id="6" name="직사각형 5">
+                <a:extLst>
+                  <a:ext uri="{FF2B5EF4-FFF2-40B4-BE49-F238E27FC236}">
+                    <a16:creationId xmlns:a16="http://schemas.microsoft.com/office/drawing/2014/main" id="{08A6FFFE-61AB-D129-2D82-D9E8A3943552}"/>
+                  </a:ext>
+                </a:extLst>
+              </p:cNvPr>
+              <p:cNvSpPr/>
+              <p:nvPr/>
+            </p:nvSpPr>
+            <p:spPr>
+              <a:xfrm>
+                <a:off x="855805" y="1778090"/>
+                <a:ext cx="1143169" cy="1718109"/>
+              </a:xfrm>
+              <a:prstGeom prst="rect">
+                <a:avLst/>
+              </a:prstGeom>
+              <a:noFill/>
+              <a:ln>
+                <a:solidFill>
+                  <a:srgbClr val="FFC000"/>
+                </a:solidFill>
+              </a:ln>
+            </p:spPr>
+            <p:style>
+              <a:lnRef idx="2">
+                <a:schemeClr val="accent1">
+                  <a:shade val="15000"/>
+                </a:schemeClr>
+              </a:lnRef>
+              <a:fillRef idx="1">
+                <a:schemeClr val="accent1"/>
+              </a:fillRef>
+              <a:effectRef idx="0">
+                <a:schemeClr val="accent1"/>
+              </a:effectRef>
+              <a:fontRef idx="minor">
+                <a:schemeClr val="lt1"/>
+              </a:fontRef>
+            </p:style>
+            <p:txBody>
+              <a:bodyPr rtlCol="0" anchor="ctr"/>
+              <a:lstStyle/>
+              <a:p>
+                <a:pPr algn="ctr"/>
+                <a:endParaRPr lang="ko-KR" altLang="en-US"/>
+              </a:p>
+            </p:txBody>
+          </p:sp>
+          <p:sp>
+            <p:nvSpPr>
+              <p:cNvPr id="9" name="직사각형 8">
+                <a:extLst>
+                  <a:ext uri="{FF2B5EF4-FFF2-40B4-BE49-F238E27FC236}">
+                    <a16:creationId xmlns:a16="http://schemas.microsoft.com/office/drawing/2014/main" id="{0EAD1FF3-985D-527A-FE2E-E4345B82A373}"/>
+                  </a:ext>
+                </a:extLst>
+              </p:cNvPr>
+              <p:cNvSpPr/>
+              <p:nvPr/>
+            </p:nvSpPr>
+            <p:spPr>
+              <a:xfrm>
+                <a:off x="864832" y="3529756"/>
+                <a:ext cx="1143169" cy="1778503"/>
+              </a:xfrm>
+              <a:prstGeom prst="rect">
+                <a:avLst/>
+              </a:prstGeom>
+              <a:noFill/>
+              <a:ln>
+                <a:solidFill>
+                  <a:srgbClr val="FFFF00"/>
+                </a:solidFill>
+              </a:ln>
+            </p:spPr>
+            <p:style>
+              <a:lnRef idx="2">
+                <a:schemeClr val="accent1">
+                  <a:shade val="15000"/>
+                </a:schemeClr>
+              </a:lnRef>
+              <a:fillRef idx="1">
+                <a:schemeClr val="accent1"/>
+              </a:fillRef>
+              <a:effectRef idx="0">
+                <a:schemeClr val="accent1"/>
+              </a:effectRef>
+              <a:fontRef idx="minor">
+                <a:schemeClr val="lt1"/>
+              </a:fontRef>
+            </p:style>
+            <p:txBody>
+              <a:bodyPr rtlCol="0" anchor="ctr"/>
+              <a:lstStyle/>
+              <a:p>
+                <a:pPr algn="ctr"/>
+                <a:endParaRPr lang="ko-KR" altLang="en-US"/>
+              </a:p>
+            </p:txBody>
+          </p:sp>
+          <p:sp>
+            <p:nvSpPr>
+              <p:cNvPr id="10" name="TextBox 9">
+                <a:extLst>
+                  <a:ext uri="{FF2B5EF4-FFF2-40B4-BE49-F238E27FC236}">
+                    <a16:creationId xmlns:a16="http://schemas.microsoft.com/office/drawing/2014/main" id="{FD0A7599-4F25-9DD4-2F88-7E13E02C0690}"/>
+                  </a:ext>
+                </a:extLst>
+              </p:cNvPr>
+              <p:cNvSpPr txBox="1"/>
+              <p:nvPr/>
+            </p:nvSpPr>
+            <p:spPr>
+              <a:xfrm>
+                <a:off x="1427388" y="1691786"/>
+                <a:ext cx="794330" cy="433720"/>
+              </a:xfrm>
+              <a:prstGeom prst="rect">
+                <a:avLst/>
+              </a:prstGeom>
+              <a:noFill/>
+            </p:spPr>
+            <p:txBody>
+              <a:bodyPr wrap="square" rtlCol="0">
+                <a:spAutoFit/>
+              </a:bodyPr>
+              <a:lstStyle/>
+              <a:p>
+                <a:r>
+                  <a:rPr lang="en-US" altLang="ko-KR">
+                    <a:solidFill>
+                      <a:srgbClr val="FFC000"/>
+                    </a:solidFill>
+                  </a:rPr>
+                  <a:t>Rx</a:t>
+                </a:r>
+                <a:endParaRPr lang="ko-KR" altLang="en-US">
+                  <a:solidFill>
+                    <a:srgbClr val="FFC000"/>
+                  </a:solidFill>
+                </a:endParaRPr>
+              </a:p>
+            </p:txBody>
+          </p:sp>
+          <p:sp>
+            <p:nvSpPr>
+              <p:cNvPr id="12" name="TextBox 11">
+                <a:extLst>
+                  <a:ext uri="{FF2B5EF4-FFF2-40B4-BE49-F238E27FC236}">
+                    <a16:creationId xmlns:a16="http://schemas.microsoft.com/office/drawing/2014/main" id="{0CE75E45-189A-63BB-CDEF-B4D5431F8924}"/>
+                  </a:ext>
+                </a:extLst>
+              </p:cNvPr>
+              <p:cNvSpPr txBox="1"/>
+              <p:nvPr/>
+            </p:nvSpPr>
+            <p:spPr>
+              <a:xfrm>
+                <a:off x="1461955" y="3447506"/>
+                <a:ext cx="794330" cy="545389"/>
+              </a:xfrm>
+              <a:prstGeom prst="rect">
+                <a:avLst/>
+              </a:prstGeom>
+              <a:noFill/>
+            </p:spPr>
+            <p:txBody>
+              <a:bodyPr wrap="square" rtlCol="0">
+                <a:spAutoFit/>
+              </a:bodyPr>
+              <a:lstStyle/>
+              <a:p>
+                <a:r>
+                  <a:rPr lang="en-US" altLang="ko-KR">
+                    <a:solidFill>
+                      <a:srgbClr val="FFFF00"/>
+                    </a:solidFill>
+                  </a:rPr>
+                  <a:t>Tx</a:t>
+                </a:r>
+                <a:endParaRPr lang="ko-KR" altLang="en-US">
+                  <a:solidFill>
+                    <a:srgbClr val="FFFF00"/>
+                  </a:solidFill>
+                </a:endParaRPr>
+              </a:p>
+            </p:txBody>
+          </p:sp>
+        </p:grpSp>
+        <p:cxnSp>
+          <p:nvCxnSpPr>
+            <p:cNvPr id="22" name="직선 화살표 연결선 21">
+              <a:extLst>
+                <a:ext uri="{FF2B5EF4-FFF2-40B4-BE49-F238E27FC236}">
+                  <a16:creationId xmlns:a16="http://schemas.microsoft.com/office/drawing/2014/main" id="{A6865848-5F91-5441-6795-DEDBFC41420C}"/>
+                </a:ext>
+              </a:extLst>
+            </p:cNvPr>
+            <p:cNvCxnSpPr/>
+            <p:nvPr/>
+          </p:nvCxnSpPr>
+          <p:spPr>
+            <a:xfrm>
+              <a:off x="6266688" y="2926080"/>
+              <a:ext cx="0" cy="737616"/>
+            </a:xfrm>
+            <a:prstGeom prst="straightConnector1">
+              <a:avLst/>
+            </a:prstGeom>
+            <a:ln>
+              <a:solidFill>
+                <a:srgbClr val="FF0000"/>
+              </a:solidFill>
+              <a:tailEnd type="triangle"/>
+            </a:ln>
+          </p:spPr>
+          <p:style>
+            <a:lnRef idx="2">
+              <a:schemeClr val="accent1"/>
+            </a:lnRef>
+            <a:fillRef idx="0">
+              <a:schemeClr val="accent1"/>
+            </a:fillRef>
+            <a:effectRef idx="1">
+              <a:schemeClr val="accent1"/>
+            </a:effectRef>
+            <a:fontRef idx="minor">
+              <a:schemeClr val="tx1"/>
+            </a:fontRef>
+          </p:style>
+        </p:cxnSp>
+        <p:grpSp>
+          <p:nvGrpSpPr>
+            <p:cNvPr id="27" name="그룹 26">
+              <a:extLst>
+                <a:ext uri="{FF2B5EF4-FFF2-40B4-BE49-F238E27FC236}">
+                  <a16:creationId xmlns:a16="http://schemas.microsoft.com/office/drawing/2014/main" id="{A4557D79-B608-C572-761E-290EB4618510}"/>
+                </a:ext>
+              </a:extLst>
+            </p:cNvPr>
+            <p:cNvGrpSpPr/>
+            <p:nvPr/>
+          </p:nvGrpSpPr>
+          <p:grpSpPr>
+            <a:xfrm>
+              <a:off x="4911552" y="3483241"/>
+              <a:ext cx="1986611" cy="274889"/>
+              <a:chOff x="6249084" y="3401158"/>
+              <a:chExt cx="1986611" cy="274889"/>
+            </a:xfrm>
+          </p:grpSpPr>
+          <p:sp>
+            <p:nvSpPr>
+              <p:cNvPr id="23" name="TextBox 22">
+                <a:extLst>
+                  <a:ext uri="{FF2B5EF4-FFF2-40B4-BE49-F238E27FC236}">
+                    <a16:creationId xmlns:a16="http://schemas.microsoft.com/office/drawing/2014/main" id="{781D1725-B6EC-01DB-174C-AC14A13ECCD8}"/>
+                  </a:ext>
+                </a:extLst>
+              </p:cNvPr>
+              <p:cNvSpPr txBox="1"/>
+              <p:nvPr/>
+            </p:nvSpPr>
+            <p:spPr>
+              <a:xfrm>
+                <a:off x="6266688" y="3425388"/>
+                <a:ext cx="1969007" cy="250659"/>
+              </a:xfrm>
+              <a:prstGeom prst="rect">
+                <a:avLst/>
+              </a:prstGeom>
+              <a:noFill/>
+            </p:spPr>
+            <p:txBody>
+              <a:bodyPr wrap="square" rtlCol="0">
+                <a:spAutoFit/>
+              </a:bodyPr>
+              <a:lstStyle/>
+              <a:p>
+                <a:r>
+                  <a:rPr lang="en-US" altLang="ko-KR" sz="900">
+                    <a:highlight>
+                      <a:srgbClr val="FFFF00"/>
+                    </a:highlight>
+                  </a:rPr>
+                  <a:t>rx_done </a:t>
+                </a:r>
+                <a:r>
+                  <a:rPr lang="ko-KR" altLang="en-US" sz="900">
+                    <a:highlight>
+                      <a:srgbClr val="FFFF00"/>
+                    </a:highlight>
+                  </a:rPr>
+                  <a:t>→ </a:t>
+                </a:r>
+                <a:r>
+                  <a:rPr lang="en-US" altLang="ko-KR" sz="900">
+                    <a:highlight>
+                      <a:srgbClr val="FFFF00"/>
+                    </a:highlight>
+                  </a:rPr>
+                  <a:t>tx_start </a:t>
+                </a:r>
+                <a:endParaRPr lang="ko-KR" altLang="en-US" sz="900">
+                  <a:highlight>
+                    <a:srgbClr val="FFFF00"/>
+                  </a:highlight>
+                </a:endParaRPr>
+              </a:p>
+            </p:txBody>
+          </p:sp>
+          <p:sp>
+            <p:nvSpPr>
+              <p:cNvPr id="25" name="타원 24">
+                <a:extLst>
+                  <a:ext uri="{FF2B5EF4-FFF2-40B4-BE49-F238E27FC236}">
+                    <a16:creationId xmlns:a16="http://schemas.microsoft.com/office/drawing/2014/main" id="{2C82A134-DED5-7FB9-2543-E4D0BB3F498F}"/>
+                  </a:ext>
+                </a:extLst>
+              </p:cNvPr>
+              <p:cNvSpPr/>
+              <p:nvPr/>
+            </p:nvSpPr>
+            <p:spPr>
+              <a:xfrm>
+                <a:off x="6249084" y="3401158"/>
+                <a:ext cx="152399" cy="128016"/>
+              </a:xfrm>
+              <a:prstGeom prst="ellipse">
+                <a:avLst/>
+              </a:prstGeom>
+              <a:solidFill>
+                <a:srgbClr val="FFFF00"/>
+              </a:solidFill>
+              <a:ln>
+                <a:solidFill>
+                  <a:schemeClr val="tx1"/>
+                </a:solidFill>
+              </a:ln>
+            </p:spPr>
+            <p:style>
+              <a:lnRef idx="2">
+                <a:schemeClr val="accent1">
+                  <a:shade val="15000"/>
+                </a:schemeClr>
+              </a:lnRef>
+              <a:fillRef idx="1">
+                <a:schemeClr val="accent1"/>
+              </a:fillRef>
+              <a:effectRef idx="0">
+                <a:schemeClr val="accent1"/>
+              </a:effectRef>
+              <a:fontRef idx="minor">
+                <a:schemeClr val="lt1"/>
+              </a:fontRef>
+            </p:style>
+            <p:txBody>
+              <a:bodyPr rtlCol="0" anchor="ctr"/>
+              <a:lstStyle/>
+              <a:p>
+                <a:pPr algn="ctr"/>
+                <a:r>
+                  <a:rPr lang="en-US" altLang="ko-KR" sz="1050">
+                    <a:solidFill>
+                      <a:schemeClr val="tx1"/>
+                    </a:solidFill>
+                  </a:rPr>
+                  <a:t>1</a:t>
+                </a:r>
+                <a:endParaRPr lang="ko-KR" altLang="en-US" sz="1050">
+                  <a:solidFill>
+                    <a:schemeClr val="tx1"/>
+                  </a:solidFill>
+                </a:endParaRPr>
+              </a:p>
+            </p:txBody>
+          </p:sp>
+        </p:grpSp>
+        <p:sp>
+          <p:nvSpPr>
+            <p:cNvPr id="32" name="타원 31">
+              <a:extLst>
+                <a:ext uri="{FF2B5EF4-FFF2-40B4-BE49-F238E27FC236}">
+                  <a16:creationId xmlns:a16="http://schemas.microsoft.com/office/drawing/2014/main" id="{84615007-EDE0-31D7-5201-802A809689A0}"/>
+                </a:ext>
+              </a:extLst>
+            </p:cNvPr>
+            <p:cNvSpPr/>
+            <p:nvPr/>
+          </p:nvSpPr>
+          <p:spPr>
+            <a:xfrm>
+              <a:off x="6075728" y="4161267"/>
+              <a:ext cx="152399" cy="128016"/>
+            </a:xfrm>
+            <a:prstGeom prst="ellipse">
+              <a:avLst/>
+            </a:prstGeom>
+            <a:solidFill>
+              <a:srgbClr val="FFFF00"/>
+            </a:solidFill>
+            <a:ln>
+              <a:solidFill>
+                <a:schemeClr val="tx1"/>
+              </a:solidFill>
+            </a:ln>
+          </p:spPr>
+          <p:style>
+            <a:lnRef idx="2">
+              <a:schemeClr val="accent1">
+                <a:shade val="15000"/>
+              </a:schemeClr>
+            </a:lnRef>
+            <a:fillRef idx="1">
+              <a:schemeClr val="accent1"/>
+            </a:fillRef>
+            <a:effectRef idx="0">
+              <a:schemeClr val="accent1"/>
+            </a:effectRef>
+            <a:fontRef idx="minor">
+              <a:schemeClr val="lt1"/>
+            </a:fontRef>
+          </p:style>
+          <p:txBody>
+            <a:bodyPr rtlCol="0" anchor="ctr"/>
+            <a:lstStyle/>
+            <a:p>
+              <a:pPr algn="ctr"/>
+              <a:r>
+                <a:rPr lang="en-US" altLang="ko-KR" sz="1050">
+                  <a:solidFill>
+                    <a:schemeClr val="tx1"/>
+                  </a:solidFill>
+                </a:rPr>
+                <a:t>2</a:t>
+              </a:r>
+              <a:endParaRPr lang="ko-KR" altLang="en-US" sz="1050">
+                <a:solidFill>
+                  <a:schemeClr val="tx1"/>
+                </a:solidFill>
+              </a:endParaRPr>
+            </a:p>
+          </p:txBody>
+        </p:sp>
+        <p:sp>
+          <p:nvSpPr>
+            <p:cNvPr id="34" name="타원 33">
+              <a:extLst>
+                <a:ext uri="{FF2B5EF4-FFF2-40B4-BE49-F238E27FC236}">
+                  <a16:creationId xmlns:a16="http://schemas.microsoft.com/office/drawing/2014/main" id="{9445CDED-DC5D-1786-CFBE-BF8E79FB7354}"/>
+                </a:ext>
+              </a:extLst>
+            </p:cNvPr>
+            <p:cNvSpPr/>
+            <p:nvPr/>
+          </p:nvSpPr>
+          <p:spPr>
+            <a:xfrm>
+              <a:off x="6095999" y="4916179"/>
+              <a:ext cx="152399" cy="128016"/>
+            </a:xfrm>
+            <a:prstGeom prst="ellipse">
+              <a:avLst/>
+            </a:prstGeom>
+            <a:solidFill>
+              <a:srgbClr val="FFFF00"/>
+            </a:solidFill>
+            <a:ln>
+              <a:solidFill>
+                <a:schemeClr val="tx1"/>
+              </a:solidFill>
+            </a:ln>
+          </p:spPr>
+          <p:style>
+            <a:lnRef idx="2">
+              <a:schemeClr val="accent1">
+                <a:shade val="15000"/>
+              </a:schemeClr>
+            </a:lnRef>
+            <a:fillRef idx="1">
+              <a:schemeClr val="accent1"/>
+            </a:fillRef>
+            <a:effectRef idx="0">
+              <a:schemeClr val="accent1"/>
+            </a:effectRef>
+            <a:fontRef idx="minor">
+              <a:schemeClr val="lt1"/>
+            </a:fontRef>
+          </p:style>
+          <p:txBody>
+            <a:bodyPr rtlCol="0" anchor="ctr"/>
+            <a:lstStyle/>
+            <a:p>
+              <a:pPr algn="ctr"/>
+              <a:r>
+                <a:rPr lang="en-US" altLang="ko-KR" sz="1050">
+                  <a:solidFill>
+                    <a:schemeClr val="tx1"/>
+                  </a:solidFill>
+                </a:rPr>
+                <a:t>3</a:t>
+              </a:r>
+              <a:endParaRPr lang="ko-KR" altLang="en-US" sz="1050">
+                <a:solidFill>
+                  <a:schemeClr val="tx1"/>
+                </a:solidFill>
+              </a:endParaRPr>
+            </a:p>
+          </p:txBody>
+        </p:sp>
+        <p:sp>
+          <p:nvSpPr>
+            <p:cNvPr id="36" name="타원 35">
+              <a:extLst>
+                <a:ext uri="{FF2B5EF4-FFF2-40B4-BE49-F238E27FC236}">
+                  <a16:creationId xmlns:a16="http://schemas.microsoft.com/office/drawing/2014/main" id="{73EA3C36-29F1-7C24-E90D-CD30CED097C3}"/>
+                </a:ext>
+              </a:extLst>
+            </p:cNvPr>
+            <p:cNvSpPr/>
+            <p:nvPr/>
+          </p:nvSpPr>
+          <p:spPr>
+            <a:xfrm>
+              <a:off x="8656319" y="4154179"/>
+              <a:ext cx="152399" cy="128016"/>
+            </a:xfrm>
+            <a:prstGeom prst="ellipse">
+              <a:avLst/>
+            </a:prstGeom>
+            <a:solidFill>
+              <a:srgbClr val="FFFF00"/>
+            </a:solidFill>
+            <a:ln>
+              <a:solidFill>
+                <a:schemeClr val="tx1"/>
+              </a:solidFill>
+            </a:ln>
+          </p:spPr>
+          <p:style>
+            <a:lnRef idx="2">
+              <a:schemeClr val="accent1">
+                <a:shade val="15000"/>
+              </a:schemeClr>
+            </a:lnRef>
+            <a:fillRef idx="1">
+              <a:schemeClr val="accent1"/>
+            </a:fillRef>
+            <a:effectRef idx="0">
+              <a:schemeClr val="accent1"/>
+            </a:effectRef>
+            <a:fontRef idx="minor">
+              <a:schemeClr val="lt1"/>
+            </a:fontRef>
+          </p:style>
+          <p:txBody>
+            <a:bodyPr rtlCol="0" anchor="ctr"/>
+            <a:lstStyle/>
+            <a:p>
+              <a:pPr algn="ctr"/>
+              <a:r>
+                <a:rPr lang="en-US" altLang="ko-KR" sz="1050">
+                  <a:solidFill>
+                    <a:schemeClr val="tx1"/>
+                  </a:solidFill>
+                </a:rPr>
+                <a:t>4</a:t>
+              </a:r>
+              <a:endParaRPr lang="ko-KR" altLang="en-US" sz="1050">
+                <a:solidFill>
+                  <a:schemeClr val="tx1"/>
+                </a:solidFill>
+              </a:endParaRPr>
+            </a:p>
+          </p:txBody>
+        </p:sp>
+        <p:cxnSp>
+          <p:nvCxnSpPr>
+            <p:cNvPr id="38" name="직선 화살표 연결선 37">
+              <a:extLst>
+                <a:ext uri="{FF2B5EF4-FFF2-40B4-BE49-F238E27FC236}">
+                  <a16:creationId xmlns:a16="http://schemas.microsoft.com/office/drawing/2014/main" id="{B9C12E14-3BDF-5F13-BCFA-A99D8031F699}"/>
+                </a:ext>
+              </a:extLst>
+            </p:cNvPr>
+            <p:cNvCxnSpPr/>
+            <p:nvPr/>
+          </p:nvCxnSpPr>
+          <p:spPr>
+            <a:xfrm>
+              <a:off x="6662928" y="4974091"/>
+              <a:ext cx="204755" cy="0"/>
+            </a:xfrm>
+            <a:prstGeom prst="straightConnector1">
+              <a:avLst/>
+            </a:prstGeom>
+            <a:ln>
+              <a:solidFill>
+                <a:srgbClr val="FFFF00"/>
+              </a:solidFill>
+              <a:tailEnd type="triangle"/>
+            </a:ln>
+          </p:spPr>
+          <p:style>
+            <a:lnRef idx="2">
+              <a:schemeClr val="accent1"/>
+            </a:lnRef>
+            <a:fillRef idx="0">
+              <a:schemeClr val="accent1"/>
+            </a:fillRef>
+            <a:effectRef idx="1">
+              <a:schemeClr val="accent1"/>
+            </a:effectRef>
+            <a:fontRef idx="minor">
+              <a:schemeClr val="tx1"/>
+            </a:fontRef>
+          </p:style>
+        </p:cxnSp>
+        <p:cxnSp>
+          <p:nvCxnSpPr>
+            <p:cNvPr id="39" name="직선 화살표 연결선 38">
+              <a:extLst>
+                <a:ext uri="{FF2B5EF4-FFF2-40B4-BE49-F238E27FC236}">
+                  <a16:creationId xmlns:a16="http://schemas.microsoft.com/office/drawing/2014/main" id="{0C96D7E2-95DD-43E7-FBE2-03D822E0A2ED}"/>
+                </a:ext>
+              </a:extLst>
+            </p:cNvPr>
+            <p:cNvCxnSpPr>
+              <a:cxnSpLocks/>
+            </p:cNvCxnSpPr>
+            <p:nvPr/>
+          </p:nvCxnSpPr>
+          <p:spPr>
+            <a:xfrm>
+              <a:off x="6979920" y="4974091"/>
+              <a:ext cx="146304" cy="0"/>
+            </a:xfrm>
+            <a:prstGeom prst="straightConnector1">
+              <a:avLst/>
+            </a:prstGeom>
+            <a:ln>
+              <a:solidFill>
+                <a:srgbClr val="FFFF00"/>
+              </a:solidFill>
+              <a:tailEnd type="triangle"/>
+            </a:ln>
+          </p:spPr>
+          <p:style>
+            <a:lnRef idx="2">
+              <a:schemeClr val="accent1"/>
+            </a:lnRef>
+            <a:fillRef idx="0">
+              <a:schemeClr val="accent1"/>
+            </a:fillRef>
+            <a:effectRef idx="1">
+              <a:schemeClr val="accent1"/>
+            </a:effectRef>
+            <a:fontRef idx="minor">
+              <a:schemeClr val="tx1"/>
+            </a:fontRef>
+          </p:style>
+        </p:cxnSp>
+        <p:cxnSp>
+          <p:nvCxnSpPr>
+            <p:cNvPr id="41" name="직선 화살표 연결선 40">
+              <a:extLst>
+                <a:ext uri="{FF2B5EF4-FFF2-40B4-BE49-F238E27FC236}">
+                  <a16:creationId xmlns:a16="http://schemas.microsoft.com/office/drawing/2014/main" id="{028714C6-7FD8-8C78-D311-4DE7FEE19699}"/>
+                </a:ext>
+              </a:extLst>
+            </p:cNvPr>
+            <p:cNvCxnSpPr>
+              <a:cxnSpLocks/>
+            </p:cNvCxnSpPr>
+            <p:nvPr/>
+          </p:nvCxnSpPr>
+          <p:spPr>
+            <a:xfrm>
+              <a:off x="7269480" y="4974091"/>
+              <a:ext cx="146304" cy="0"/>
+            </a:xfrm>
+            <a:prstGeom prst="straightConnector1">
+              <a:avLst/>
+            </a:prstGeom>
+            <a:ln>
+              <a:solidFill>
+                <a:srgbClr val="FFFF00"/>
+              </a:solidFill>
+              <a:tailEnd type="triangle"/>
+            </a:ln>
+          </p:spPr>
+          <p:style>
+            <a:lnRef idx="2">
+              <a:schemeClr val="accent1"/>
+            </a:lnRef>
+            <a:fillRef idx="0">
+              <a:schemeClr val="accent1"/>
+            </a:fillRef>
+            <a:effectRef idx="1">
+              <a:schemeClr val="accent1"/>
+            </a:effectRef>
+            <a:fontRef idx="minor">
+              <a:schemeClr val="tx1"/>
+            </a:fontRef>
+          </p:style>
+        </p:cxnSp>
+        <p:cxnSp>
+          <p:nvCxnSpPr>
+            <p:cNvPr id="43" name="직선 화살표 연결선 42">
+              <a:extLst>
+                <a:ext uri="{FF2B5EF4-FFF2-40B4-BE49-F238E27FC236}">
+                  <a16:creationId xmlns:a16="http://schemas.microsoft.com/office/drawing/2014/main" id="{26B4A1C1-D552-66B9-EC41-DF10D13722B3}"/>
+                </a:ext>
+              </a:extLst>
+            </p:cNvPr>
+            <p:cNvCxnSpPr>
+              <a:cxnSpLocks/>
+            </p:cNvCxnSpPr>
+            <p:nvPr/>
+          </p:nvCxnSpPr>
+          <p:spPr>
+            <a:xfrm>
+              <a:off x="7536180" y="4974091"/>
+              <a:ext cx="146304" cy="0"/>
+            </a:xfrm>
+            <a:prstGeom prst="straightConnector1">
+              <a:avLst/>
+            </a:prstGeom>
+            <a:ln>
+              <a:solidFill>
+                <a:srgbClr val="FFFF00"/>
+              </a:solidFill>
+              <a:tailEnd type="triangle"/>
+            </a:ln>
+          </p:spPr>
+          <p:style>
+            <a:lnRef idx="2">
+              <a:schemeClr val="accent1"/>
+            </a:lnRef>
+            <a:fillRef idx="0">
+              <a:schemeClr val="accent1"/>
+            </a:fillRef>
+            <a:effectRef idx="1">
+              <a:schemeClr val="accent1"/>
+            </a:effectRef>
+            <a:fontRef idx="minor">
+              <a:schemeClr val="tx1"/>
+            </a:fontRef>
+          </p:style>
+        </p:cxnSp>
+        <p:cxnSp>
+          <p:nvCxnSpPr>
+            <p:cNvPr id="44" name="직선 화살표 연결선 43">
+              <a:extLst>
+                <a:ext uri="{FF2B5EF4-FFF2-40B4-BE49-F238E27FC236}">
+                  <a16:creationId xmlns:a16="http://schemas.microsoft.com/office/drawing/2014/main" id="{1149AA96-E20F-ABFF-58FE-B7FD396FA03C}"/>
+                </a:ext>
+              </a:extLst>
+            </p:cNvPr>
+            <p:cNvCxnSpPr>
+              <a:cxnSpLocks/>
+            </p:cNvCxnSpPr>
+            <p:nvPr/>
+          </p:nvCxnSpPr>
+          <p:spPr>
+            <a:xfrm>
+              <a:off x="7787640" y="4974091"/>
+              <a:ext cx="146304" cy="0"/>
+            </a:xfrm>
+            <a:prstGeom prst="straightConnector1">
+              <a:avLst/>
+            </a:prstGeom>
+            <a:ln>
+              <a:solidFill>
+                <a:srgbClr val="FFFF00"/>
+              </a:solidFill>
+              <a:tailEnd type="triangle"/>
+            </a:ln>
+          </p:spPr>
+          <p:style>
+            <a:lnRef idx="2">
+              <a:schemeClr val="accent1"/>
+            </a:lnRef>
+            <a:fillRef idx="0">
+              <a:schemeClr val="accent1"/>
+            </a:fillRef>
+            <a:effectRef idx="1">
+              <a:schemeClr val="accent1"/>
+            </a:effectRef>
+            <a:fontRef idx="minor">
+              <a:schemeClr val="tx1"/>
+            </a:fontRef>
+          </p:style>
+        </p:cxnSp>
+        <p:cxnSp>
+          <p:nvCxnSpPr>
+            <p:cNvPr id="45" name="직선 화살표 연결선 44">
+              <a:extLst>
+                <a:ext uri="{FF2B5EF4-FFF2-40B4-BE49-F238E27FC236}">
+                  <a16:creationId xmlns:a16="http://schemas.microsoft.com/office/drawing/2014/main" id="{7965B6C5-3089-8839-AB2F-C1B342F01C78}"/>
+                </a:ext>
+              </a:extLst>
+            </p:cNvPr>
+            <p:cNvCxnSpPr>
+              <a:cxnSpLocks/>
+            </p:cNvCxnSpPr>
+            <p:nvPr/>
+          </p:nvCxnSpPr>
+          <p:spPr>
+            <a:xfrm>
+              <a:off x="8054340" y="4974091"/>
+              <a:ext cx="146304" cy="0"/>
+            </a:xfrm>
+            <a:prstGeom prst="straightConnector1">
+              <a:avLst/>
+            </a:prstGeom>
+            <a:ln>
+              <a:solidFill>
+                <a:srgbClr val="FFFF00"/>
+              </a:solidFill>
+              <a:tailEnd type="triangle"/>
+            </a:ln>
+          </p:spPr>
+          <p:style>
+            <a:lnRef idx="2">
+              <a:schemeClr val="accent1"/>
+            </a:lnRef>
+            <a:fillRef idx="0">
+              <a:schemeClr val="accent1"/>
+            </a:fillRef>
+            <a:effectRef idx="1">
+              <a:schemeClr val="accent1"/>
+            </a:effectRef>
+            <a:fontRef idx="minor">
+              <a:schemeClr val="tx1"/>
+            </a:fontRef>
+          </p:style>
+        </p:cxnSp>
+        <p:grpSp>
+          <p:nvGrpSpPr>
+            <p:cNvPr id="58" name="그룹 57">
+              <a:extLst>
+                <a:ext uri="{FF2B5EF4-FFF2-40B4-BE49-F238E27FC236}">
+                  <a16:creationId xmlns:a16="http://schemas.microsoft.com/office/drawing/2014/main" id="{F138D3A2-3388-F7D0-19F7-7BDADA2FB09F}"/>
+                </a:ext>
+              </a:extLst>
+            </p:cNvPr>
+            <p:cNvGrpSpPr/>
+            <p:nvPr/>
+          </p:nvGrpSpPr>
+          <p:grpSpPr>
+            <a:xfrm>
+              <a:off x="6531625" y="3972560"/>
+              <a:ext cx="2126727" cy="943617"/>
+              <a:chOff x="6531625" y="3972560"/>
+              <a:chExt cx="2126727" cy="1285240"/>
+            </a:xfrm>
+          </p:grpSpPr>
+          <p:cxnSp>
+            <p:nvCxnSpPr>
+              <p:cNvPr id="47" name="직선 연결선 46">
+                <a:extLst>
+                  <a:ext uri="{FF2B5EF4-FFF2-40B4-BE49-F238E27FC236}">
+                    <a16:creationId xmlns:a16="http://schemas.microsoft.com/office/drawing/2014/main" id="{36087FD6-586F-8632-B1B6-EA82A9BE531D}"/>
+                  </a:ext>
+                </a:extLst>
+              </p:cNvPr>
+              <p:cNvCxnSpPr/>
+              <p:nvPr/>
+            </p:nvCxnSpPr>
+            <p:spPr>
+              <a:xfrm>
+                <a:off x="6790705" y="3972560"/>
+                <a:ext cx="0" cy="1285240"/>
+              </a:xfrm>
+              <a:prstGeom prst="line">
+                <a:avLst/>
+              </a:prstGeom>
+              <a:ln w="9525">
+                <a:solidFill>
+                  <a:srgbClr val="FFFF00"/>
+                </a:solidFill>
+                <a:prstDash val="sysDot"/>
+              </a:ln>
+            </p:spPr>
+            <p:style>
+              <a:lnRef idx="2">
+                <a:schemeClr val="accent1"/>
+              </a:lnRef>
+              <a:fillRef idx="0">
+                <a:schemeClr val="accent1"/>
+              </a:fillRef>
+              <a:effectRef idx="1">
+                <a:schemeClr val="accent1"/>
+              </a:effectRef>
+              <a:fontRef idx="minor">
+                <a:schemeClr val="tx1"/>
+              </a:fontRef>
+            </p:style>
+          </p:cxnSp>
+          <p:cxnSp>
+            <p:nvCxnSpPr>
+              <p:cNvPr id="48" name="직선 연결선 47">
+                <a:extLst>
+                  <a:ext uri="{FF2B5EF4-FFF2-40B4-BE49-F238E27FC236}">
+                    <a16:creationId xmlns:a16="http://schemas.microsoft.com/office/drawing/2014/main" id="{3082D0F7-F307-7087-4CD0-AF2FD2F0074C}"/>
+                  </a:ext>
+                </a:extLst>
+              </p:cNvPr>
+              <p:cNvCxnSpPr>
+                <a:cxnSpLocks/>
+              </p:cNvCxnSpPr>
+              <p:nvPr/>
+            </p:nvCxnSpPr>
+            <p:spPr>
+              <a:xfrm>
+                <a:off x="6531625" y="3972560"/>
+                <a:ext cx="0" cy="1285240"/>
+              </a:xfrm>
+              <a:prstGeom prst="line">
+                <a:avLst/>
+              </a:prstGeom>
+              <a:ln w="9525">
+                <a:solidFill>
+                  <a:srgbClr val="FFFF00"/>
+                </a:solidFill>
+                <a:prstDash val="sysDot"/>
+              </a:ln>
+            </p:spPr>
+            <p:style>
+              <a:lnRef idx="2">
+                <a:schemeClr val="accent1"/>
+              </a:lnRef>
+              <a:fillRef idx="0">
+                <a:schemeClr val="accent1"/>
+              </a:fillRef>
+              <a:effectRef idx="1">
+                <a:schemeClr val="accent1"/>
+              </a:effectRef>
+              <a:fontRef idx="minor">
+                <a:schemeClr val="tx1"/>
+              </a:fontRef>
+            </p:style>
+          </p:cxnSp>
+          <p:cxnSp>
+            <p:nvCxnSpPr>
+              <p:cNvPr id="49" name="직선 연결선 48">
+                <a:extLst>
+                  <a:ext uri="{FF2B5EF4-FFF2-40B4-BE49-F238E27FC236}">
+                    <a16:creationId xmlns:a16="http://schemas.microsoft.com/office/drawing/2014/main" id="{65213725-63A7-B148-18BF-A673D28B0FC7}"/>
+                  </a:ext>
+                </a:extLst>
+              </p:cNvPr>
+              <p:cNvCxnSpPr/>
+              <p:nvPr/>
+            </p:nvCxnSpPr>
+            <p:spPr>
+              <a:xfrm>
+                <a:off x="7337552" y="3972560"/>
+                <a:ext cx="0" cy="1285240"/>
+              </a:xfrm>
+              <a:prstGeom prst="line">
+                <a:avLst/>
+              </a:prstGeom>
+              <a:ln w="9525">
+                <a:solidFill>
+                  <a:srgbClr val="FFFF00"/>
+                </a:solidFill>
+                <a:prstDash val="sysDot"/>
+              </a:ln>
+            </p:spPr>
+            <p:style>
+              <a:lnRef idx="2">
+                <a:schemeClr val="accent1"/>
+              </a:lnRef>
+              <a:fillRef idx="0">
+                <a:schemeClr val="accent1"/>
+              </a:fillRef>
+              <a:effectRef idx="1">
+                <a:schemeClr val="accent1"/>
+              </a:effectRef>
+              <a:fontRef idx="minor">
+                <a:schemeClr val="tx1"/>
+              </a:fontRef>
+            </p:style>
+          </p:cxnSp>
+          <p:cxnSp>
+            <p:nvCxnSpPr>
+              <p:cNvPr id="50" name="직선 연결선 49">
+                <a:extLst>
+                  <a:ext uri="{FF2B5EF4-FFF2-40B4-BE49-F238E27FC236}">
+                    <a16:creationId xmlns:a16="http://schemas.microsoft.com/office/drawing/2014/main" id="{467A74A7-897B-637D-BD06-FE6FD56847E2}"/>
+                  </a:ext>
+                </a:extLst>
+              </p:cNvPr>
+              <p:cNvCxnSpPr/>
+              <p:nvPr/>
+            </p:nvCxnSpPr>
+            <p:spPr>
+              <a:xfrm>
+                <a:off x="7073392" y="3972560"/>
+                <a:ext cx="0" cy="1285240"/>
+              </a:xfrm>
+              <a:prstGeom prst="line">
+                <a:avLst/>
+              </a:prstGeom>
+              <a:ln w="9525">
+                <a:solidFill>
+                  <a:srgbClr val="FFFF00"/>
+                </a:solidFill>
+                <a:prstDash val="sysDot"/>
+              </a:ln>
+            </p:spPr>
+            <p:style>
+              <a:lnRef idx="2">
+                <a:schemeClr val="accent1"/>
+              </a:lnRef>
+              <a:fillRef idx="0">
+                <a:schemeClr val="accent1"/>
+              </a:fillRef>
+              <a:effectRef idx="1">
+                <a:schemeClr val="accent1"/>
+              </a:effectRef>
+              <a:fontRef idx="minor">
+                <a:schemeClr val="tx1"/>
+              </a:fontRef>
+            </p:style>
+          </p:cxnSp>
+          <p:cxnSp>
+            <p:nvCxnSpPr>
+              <p:cNvPr id="51" name="직선 연결선 50">
+                <a:extLst>
+                  <a:ext uri="{FF2B5EF4-FFF2-40B4-BE49-F238E27FC236}">
+                    <a16:creationId xmlns:a16="http://schemas.microsoft.com/office/drawing/2014/main" id="{30CB3C29-A3CA-B2F1-72F8-5D580E5655B2}"/>
+                  </a:ext>
+                </a:extLst>
+              </p:cNvPr>
+              <p:cNvCxnSpPr/>
+              <p:nvPr/>
+            </p:nvCxnSpPr>
+            <p:spPr>
+              <a:xfrm>
+                <a:off x="7860792" y="3972560"/>
+                <a:ext cx="0" cy="1285240"/>
+              </a:xfrm>
+              <a:prstGeom prst="line">
+                <a:avLst/>
+              </a:prstGeom>
+              <a:ln w="9525">
+                <a:solidFill>
+                  <a:srgbClr val="FFFF00"/>
+                </a:solidFill>
+                <a:prstDash val="sysDot"/>
+              </a:ln>
+            </p:spPr>
+            <p:style>
+              <a:lnRef idx="2">
+                <a:schemeClr val="accent1"/>
+              </a:lnRef>
+              <a:fillRef idx="0">
+                <a:schemeClr val="accent1"/>
+              </a:fillRef>
+              <a:effectRef idx="1">
+                <a:schemeClr val="accent1"/>
+              </a:effectRef>
+              <a:fontRef idx="minor">
+                <a:schemeClr val="tx1"/>
+              </a:fontRef>
+            </p:style>
+          </p:cxnSp>
+          <p:cxnSp>
+            <p:nvCxnSpPr>
+              <p:cNvPr id="52" name="직선 연결선 51">
+                <a:extLst>
+                  <a:ext uri="{FF2B5EF4-FFF2-40B4-BE49-F238E27FC236}">
+                    <a16:creationId xmlns:a16="http://schemas.microsoft.com/office/drawing/2014/main" id="{57C6FDE1-3199-8DA2-40B7-8E9AA93B9978}"/>
+                  </a:ext>
+                </a:extLst>
+              </p:cNvPr>
+              <p:cNvCxnSpPr/>
+              <p:nvPr/>
+            </p:nvCxnSpPr>
+            <p:spPr>
+              <a:xfrm>
+                <a:off x="7601712" y="3972560"/>
+                <a:ext cx="0" cy="1285240"/>
+              </a:xfrm>
+              <a:prstGeom prst="line">
+                <a:avLst/>
+              </a:prstGeom>
+              <a:ln w="9525">
+                <a:solidFill>
+                  <a:srgbClr val="FFFF00"/>
+                </a:solidFill>
+                <a:prstDash val="sysDot"/>
+              </a:ln>
+            </p:spPr>
+            <p:style>
+              <a:lnRef idx="2">
+                <a:schemeClr val="accent1"/>
+              </a:lnRef>
+              <a:fillRef idx="0">
+                <a:schemeClr val="accent1"/>
+              </a:fillRef>
+              <a:effectRef idx="1">
+                <a:schemeClr val="accent1"/>
+              </a:effectRef>
+              <a:fontRef idx="minor">
+                <a:schemeClr val="tx1"/>
+              </a:fontRef>
+            </p:style>
+          </p:cxnSp>
+          <p:cxnSp>
+            <p:nvCxnSpPr>
+              <p:cNvPr id="53" name="직선 연결선 52">
+                <a:extLst>
+                  <a:ext uri="{FF2B5EF4-FFF2-40B4-BE49-F238E27FC236}">
+                    <a16:creationId xmlns:a16="http://schemas.microsoft.com/office/drawing/2014/main" id="{4FADF0ED-0BF8-6B1B-CD4B-01124F13A962}"/>
+                  </a:ext>
+                </a:extLst>
+              </p:cNvPr>
+              <p:cNvCxnSpPr/>
+              <p:nvPr/>
+            </p:nvCxnSpPr>
+            <p:spPr>
+              <a:xfrm>
+                <a:off x="8378952" y="3972560"/>
+                <a:ext cx="0" cy="1285240"/>
+              </a:xfrm>
+              <a:prstGeom prst="line">
+                <a:avLst/>
+              </a:prstGeom>
+              <a:ln w="9525">
+                <a:solidFill>
+                  <a:srgbClr val="FFFF00"/>
+                </a:solidFill>
+                <a:prstDash val="sysDot"/>
+              </a:ln>
+            </p:spPr>
+            <p:style>
+              <a:lnRef idx="2">
+                <a:schemeClr val="accent1"/>
+              </a:lnRef>
+              <a:fillRef idx="0">
+                <a:schemeClr val="accent1"/>
+              </a:fillRef>
+              <a:effectRef idx="1">
+                <a:schemeClr val="accent1"/>
+              </a:effectRef>
+              <a:fontRef idx="minor">
+                <a:schemeClr val="tx1"/>
+              </a:fontRef>
+            </p:style>
+          </p:cxnSp>
+          <p:cxnSp>
+            <p:nvCxnSpPr>
+              <p:cNvPr id="54" name="직선 연결선 53">
+                <a:extLst>
+                  <a:ext uri="{FF2B5EF4-FFF2-40B4-BE49-F238E27FC236}">
+                    <a16:creationId xmlns:a16="http://schemas.microsoft.com/office/drawing/2014/main" id="{B249DAAD-363C-C322-4E3D-648FD6E51AB6}"/>
+                  </a:ext>
+                </a:extLst>
+              </p:cNvPr>
+              <p:cNvCxnSpPr/>
+              <p:nvPr/>
+            </p:nvCxnSpPr>
+            <p:spPr>
+              <a:xfrm>
+                <a:off x="8119872" y="3972560"/>
+                <a:ext cx="0" cy="1285240"/>
+              </a:xfrm>
+              <a:prstGeom prst="line">
+                <a:avLst/>
+              </a:prstGeom>
+              <a:ln w="9525">
+                <a:solidFill>
+                  <a:srgbClr val="FFFF00"/>
+                </a:solidFill>
+                <a:prstDash val="sysDot"/>
+              </a:ln>
+            </p:spPr>
+            <p:style>
+              <a:lnRef idx="2">
+                <a:schemeClr val="accent1"/>
+              </a:lnRef>
+              <a:fillRef idx="0">
+                <a:schemeClr val="accent1"/>
+              </a:fillRef>
+              <a:effectRef idx="1">
+                <a:schemeClr val="accent1"/>
+              </a:effectRef>
+              <a:fontRef idx="minor">
+                <a:schemeClr val="tx1"/>
+              </a:fontRef>
+            </p:style>
+          </p:cxnSp>
+          <p:cxnSp>
+            <p:nvCxnSpPr>
+              <p:cNvPr id="56" name="직선 연결선 55">
+                <a:extLst>
+                  <a:ext uri="{FF2B5EF4-FFF2-40B4-BE49-F238E27FC236}">
+                    <a16:creationId xmlns:a16="http://schemas.microsoft.com/office/drawing/2014/main" id="{B5167717-8B1D-8D27-275C-C0BB14AB338C}"/>
+                  </a:ext>
+                </a:extLst>
+              </p:cNvPr>
+              <p:cNvCxnSpPr/>
+              <p:nvPr/>
+            </p:nvCxnSpPr>
+            <p:spPr>
+              <a:xfrm>
+                <a:off x="8658352" y="3972560"/>
+                <a:ext cx="0" cy="1285240"/>
+              </a:xfrm>
+              <a:prstGeom prst="line">
+                <a:avLst/>
+              </a:prstGeom>
+              <a:ln w="9525">
+                <a:solidFill>
+                  <a:srgbClr val="FFFF00"/>
+                </a:solidFill>
+                <a:prstDash val="sysDot"/>
+              </a:ln>
+            </p:spPr>
+            <p:style>
+              <a:lnRef idx="2">
+                <a:schemeClr val="accent1"/>
+              </a:lnRef>
+              <a:fillRef idx="0">
+                <a:schemeClr val="accent1"/>
+              </a:fillRef>
+              <a:effectRef idx="1">
+                <a:schemeClr val="accent1"/>
+              </a:effectRef>
+              <a:fontRef idx="minor">
+                <a:schemeClr val="tx1"/>
+              </a:fontRef>
+            </p:style>
+          </p:cxnSp>
+        </p:grpSp>
+        <p:sp>
+          <p:nvSpPr>
+            <p:cNvPr id="59" name="직사각형 58">
+              <a:extLst>
+                <a:ext uri="{FF2B5EF4-FFF2-40B4-BE49-F238E27FC236}">
+                  <a16:creationId xmlns:a16="http://schemas.microsoft.com/office/drawing/2014/main" id="{EFB60EE5-62C9-50B0-DA3B-9A6CC5CED60B}"/>
+                </a:ext>
+              </a:extLst>
+            </p:cNvPr>
+            <p:cNvSpPr/>
+            <p:nvPr/>
+          </p:nvSpPr>
+          <p:spPr>
+            <a:xfrm>
+              <a:off x="6314440" y="4916177"/>
+              <a:ext cx="333009" cy="128012"/>
+            </a:xfrm>
+            <a:prstGeom prst="rect">
+              <a:avLst/>
+            </a:prstGeom>
+            <a:noFill/>
+            <a:ln>
+              <a:solidFill>
+                <a:srgbClr val="FFFF00"/>
+              </a:solidFill>
+            </a:ln>
+          </p:spPr>
+          <p:style>
+            <a:lnRef idx="2">
+              <a:schemeClr val="accent1">
+                <a:shade val="15000"/>
+              </a:schemeClr>
+            </a:lnRef>
+            <a:fillRef idx="1">
+              <a:schemeClr val="accent1"/>
+            </a:fillRef>
+            <a:effectRef idx="0">
+              <a:schemeClr val="accent1"/>
+            </a:effectRef>
+            <a:fontRef idx="minor">
+              <a:schemeClr val="lt1"/>
+            </a:fontRef>
+          </p:style>
+          <p:txBody>
+            <a:bodyPr rtlCol="0" anchor="ctr"/>
+            <a:lstStyle/>
+            <a:p>
+              <a:pPr algn="ctr"/>
+              <a:endParaRPr lang="ko-KR" altLang="en-US"/>
+            </a:p>
+          </p:txBody>
+        </p:sp>
+      </p:grpSp>
+      <p:grpSp>
+        <p:nvGrpSpPr>
+          <p:cNvPr id="77" name="그룹 76">
+            <a:extLst>
+              <a:ext uri="{FF2B5EF4-FFF2-40B4-BE49-F238E27FC236}">
+                <a16:creationId xmlns:a16="http://schemas.microsoft.com/office/drawing/2014/main" id="{563EC726-83BB-BAB6-52EA-3BCE5A606A40}"/>
+              </a:ext>
+            </a:extLst>
+          </p:cNvPr>
+          <p:cNvGrpSpPr/>
+          <p:nvPr/>
+        </p:nvGrpSpPr>
+        <p:grpSpPr>
+          <a:xfrm>
+            <a:off x="656273" y="883118"/>
+            <a:ext cx="8774686" cy="1101793"/>
+            <a:chOff x="1426891" y="903801"/>
+            <a:chExt cx="8774686" cy="1827206"/>
+          </a:xfrm>
+        </p:grpSpPr>
+        <p:grpSp>
+          <p:nvGrpSpPr>
+            <p:cNvPr id="66" name="그룹 65">
+              <a:extLst>
+                <a:ext uri="{FF2B5EF4-FFF2-40B4-BE49-F238E27FC236}">
+                  <a16:creationId xmlns:a16="http://schemas.microsoft.com/office/drawing/2014/main" id="{1EC449C3-C274-10D0-F089-DEAF42A5ABBE}"/>
+                </a:ext>
+              </a:extLst>
+            </p:cNvPr>
+            <p:cNvGrpSpPr/>
+            <p:nvPr/>
+          </p:nvGrpSpPr>
+          <p:grpSpPr>
+            <a:xfrm>
+              <a:off x="1426891" y="903801"/>
+              <a:ext cx="3393200" cy="328152"/>
+              <a:chOff x="399079" y="955217"/>
+              <a:chExt cx="3393200" cy="328152"/>
+            </a:xfrm>
+          </p:grpSpPr>
+          <p:sp>
+            <p:nvSpPr>
+              <p:cNvPr id="62" name="타원 61">
+                <a:extLst>
+                  <a:ext uri="{FF2B5EF4-FFF2-40B4-BE49-F238E27FC236}">
+                    <a16:creationId xmlns:a16="http://schemas.microsoft.com/office/drawing/2014/main" id="{FE702BB4-1C97-3D7B-21C2-031BCAAC08A7}"/>
+                  </a:ext>
+                </a:extLst>
+              </p:cNvPr>
+              <p:cNvSpPr/>
+              <p:nvPr/>
+            </p:nvSpPr>
+            <p:spPr>
+              <a:xfrm>
+                <a:off x="399079" y="1028192"/>
+                <a:ext cx="266420" cy="255177"/>
+              </a:xfrm>
+              <a:prstGeom prst="ellipse">
+                <a:avLst/>
+              </a:prstGeom>
+              <a:solidFill>
+                <a:srgbClr val="FFFF00"/>
+              </a:solidFill>
+              <a:ln>
+                <a:solidFill>
+                  <a:schemeClr val="tx1"/>
+                </a:solidFill>
+              </a:ln>
+            </p:spPr>
+            <p:style>
+              <a:lnRef idx="2">
+                <a:schemeClr val="accent1">
+                  <a:shade val="15000"/>
+                </a:schemeClr>
+              </a:lnRef>
+              <a:fillRef idx="1">
+                <a:schemeClr val="accent1"/>
+              </a:fillRef>
+              <a:effectRef idx="0">
+                <a:schemeClr val="accent1"/>
+              </a:effectRef>
+              <a:fontRef idx="minor">
+                <a:schemeClr val="lt1"/>
+              </a:fontRef>
+            </p:style>
+            <p:txBody>
+              <a:bodyPr rtlCol="0" anchor="ctr"/>
+              <a:lstStyle/>
+              <a:p>
+                <a:pPr algn="ctr"/>
+                <a:r>
+                  <a:rPr lang="en-US" altLang="ko-KR" sz="1600" b="1">
+                    <a:solidFill>
+                      <a:schemeClr val="tx1"/>
+                    </a:solidFill>
+                  </a:rPr>
+                  <a:t>1</a:t>
+                </a:r>
+                <a:endParaRPr lang="ko-KR" altLang="en-US" sz="1600" b="1">
+                  <a:solidFill>
+                    <a:schemeClr val="tx1"/>
+                  </a:solidFill>
+                </a:endParaRPr>
+              </a:p>
+            </p:txBody>
+          </p:sp>
+          <p:sp>
+            <p:nvSpPr>
+              <p:cNvPr id="65" name="TextBox 64">
+                <a:extLst>
+                  <a:ext uri="{FF2B5EF4-FFF2-40B4-BE49-F238E27FC236}">
+                    <a16:creationId xmlns:a16="http://schemas.microsoft.com/office/drawing/2014/main" id="{12679CC6-AEDA-006E-DB43-DBD885C53CCF}"/>
+                  </a:ext>
+                </a:extLst>
+              </p:cNvPr>
+              <p:cNvSpPr txBox="1"/>
+              <p:nvPr/>
+            </p:nvSpPr>
+            <p:spPr>
+              <a:xfrm>
+                <a:off x="807198" y="955217"/>
+                <a:ext cx="2985081" cy="307777"/>
+              </a:xfrm>
+              <a:prstGeom prst="rect">
+                <a:avLst/>
+              </a:prstGeom>
+              <a:noFill/>
+            </p:spPr>
+            <p:txBody>
+              <a:bodyPr wrap="square" rtlCol="0">
+                <a:spAutoFit/>
+              </a:bodyPr>
+              <a:lstStyle/>
+              <a:p>
+                <a:r>
+                  <a:rPr lang="en-US" altLang="ko-KR" sz="1400"/>
+                  <a:t>Rx_done -&gt; tx_start</a:t>
+                </a:r>
+                <a:endParaRPr lang="ko-KR" altLang="en-US" sz="1400"/>
+              </a:p>
+            </p:txBody>
+          </p:sp>
+        </p:grpSp>
+        <p:grpSp>
+          <p:nvGrpSpPr>
+            <p:cNvPr id="68" name="그룹 67">
+              <a:extLst>
+                <a:ext uri="{FF2B5EF4-FFF2-40B4-BE49-F238E27FC236}">
+                  <a16:creationId xmlns:a16="http://schemas.microsoft.com/office/drawing/2014/main" id="{C9B68498-9DCF-EF56-3E33-ACB23C656348}"/>
+                </a:ext>
+              </a:extLst>
+            </p:cNvPr>
+            <p:cNvGrpSpPr/>
+            <p:nvPr/>
+          </p:nvGrpSpPr>
+          <p:grpSpPr>
+            <a:xfrm>
+              <a:off x="1426891" y="1342160"/>
+              <a:ext cx="4442152" cy="328152"/>
+              <a:chOff x="399079" y="955217"/>
+              <a:chExt cx="4442152" cy="328152"/>
+            </a:xfrm>
+          </p:grpSpPr>
+          <p:sp>
+            <p:nvSpPr>
+              <p:cNvPr id="69" name="타원 68">
+                <a:extLst>
+                  <a:ext uri="{FF2B5EF4-FFF2-40B4-BE49-F238E27FC236}">
+                    <a16:creationId xmlns:a16="http://schemas.microsoft.com/office/drawing/2014/main" id="{3E2DFFA6-AE76-88B7-9D1C-36ED6E1A3876}"/>
+                  </a:ext>
+                </a:extLst>
+              </p:cNvPr>
+              <p:cNvSpPr/>
+              <p:nvPr/>
+            </p:nvSpPr>
+            <p:spPr>
+              <a:xfrm>
+                <a:off x="399079" y="1028192"/>
+                <a:ext cx="266420" cy="255177"/>
+              </a:xfrm>
+              <a:prstGeom prst="ellipse">
+                <a:avLst/>
+              </a:prstGeom>
+              <a:solidFill>
+                <a:srgbClr val="FFFF00"/>
+              </a:solidFill>
+              <a:ln>
+                <a:solidFill>
+                  <a:schemeClr val="tx1"/>
+                </a:solidFill>
+              </a:ln>
+            </p:spPr>
+            <p:style>
+              <a:lnRef idx="2">
+                <a:schemeClr val="accent1">
+                  <a:shade val="15000"/>
+                </a:schemeClr>
+              </a:lnRef>
+              <a:fillRef idx="1">
+                <a:schemeClr val="accent1"/>
+              </a:fillRef>
+              <a:effectRef idx="0">
+                <a:schemeClr val="accent1"/>
+              </a:effectRef>
+              <a:fontRef idx="minor">
+                <a:schemeClr val="lt1"/>
+              </a:fontRef>
+            </p:style>
+            <p:txBody>
+              <a:bodyPr rtlCol="0" anchor="ctr"/>
+              <a:lstStyle/>
+              <a:p>
+                <a:pPr algn="ctr"/>
+                <a:r>
+                  <a:rPr lang="en-US" altLang="ko-KR" sz="1600" b="1">
+                    <a:solidFill>
+                      <a:schemeClr val="tx1"/>
+                    </a:solidFill>
+                  </a:rPr>
+                  <a:t>2</a:t>
+                </a:r>
+                <a:endParaRPr lang="ko-KR" altLang="en-US" sz="1600" b="1">
+                  <a:solidFill>
+                    <a:schemeClr val="tx1"/>
+                  </a:solidFill>
+                </a:endParaRPr>
+              </a:p>
+            </p:txBody>
+          </p:sp>
+          <p:sp>
+            <p:nvSpPr>
+              <p:cNvPr id="70" name="TextBox 69">
+                <a:extLst>
+                  <a:ext uri="{FF2B5EF4-FFF2-40B4-BE49-F238E27FC236}">
+                    <a16:creationId xmlns:a16="http://schemas.microsoft.com/office/drawing/2014/main" id="{B1FAFD54-3554-AEE5-CC3A-C6DF0FB274D8}"/>
+                  </a:ext>
+                </a:extLst>
+              </p:cNvPr>
+              <p:cNvSpPr txBox="1"/>
+              <p:nvPr/>
+            </p:nvSpPr>
+            <p:spPr>
+              <a:xfrm>
+                <a:off x="807198" y="955217"/>
+                <a:ext cx="4034033" cy="307777"/>
+              </a:xfrm>
+              <a:prstGeom prst="rect">
+                <a:avLst/>
+              </a:prstGeom>
+              <a:noFill/>
+            </p:spPr>
+            <p:txBody>
+              <a:bodyPr wrap="square" rtlCol="0">
+                <a:spAutoFit/>
+              </a:bodyPr>
+              <a:lstStyle/>
+              <a:p>
+                <a:r>
+                  <a:rPr lang="en-US" altLang="ko-KR" sz="1400"/>
+                  <a:t>tx_start </a:t>
+                </a:r>
+                <a:r>
+                  <a:rPr lang="ko-KR" altLang="en-US" sz="1400"/>
+                  <a:t>이후</a:t>
+                </a:r>
+                <a:r>
+                  <a:rPr lang="en-US" altLang="ko-KR" sz="1400"/>
+                  <a:t>, tx signal deassert </a:t>
+                </a:r>
+                <a:endParaRPr lang="ko-KR" altLang="en-US" sz="1400"/>
+              </a:p>
+            </p:txBody>
+          </p:sp>
+        </p:grpSp>
+        <p:grpSp>
+          <p:nvGrpSpPr>
+            <p:cNvPr id="71" name="그룹 70">
+              <a:extLst>
+                <a:ext uri="{FF2B5EF4-FFF2-40B4-BE49-F238E27FC236}">
+                  <a16:creationId xmlns:a16="http://schemas.microsoft.com/office/drawing/2014/main" id="{078B967F-FF6E-506D-4589-9EEE9F12F6EE}"/>
+                </a:ext>
+              </a:extLst>
+            </p:cNvPr>
+            <p:cNvGrpSpPr/>
+            <p:nvPr/>
+          </p:nvGrpSpPr>
+          <p:grpSpPr>
+            <a:xfrm>
+              <a:off x="1426891" y="1784178"/>
+              <a:ext cx="8774686" cy="328152"/>
+              <a:chOff x="399079" y="955217"/>
+              <a:chExt cx="8774686" cy="328152"/>
+            </a:xfrm>
+          </p:grpSpPr>
+          <p:sp>
+            <p:nvSpPr>
+              <p:cNvPr id="72" name="타원 71">
+                <a:extLst>
+                  <a:ext uri="{FF2B5EF4-FFF2-40B4-BE49-F238E27FC236}">
+                    <a16:creationId xmlns:a16="http://schemas.microsoft.com/office/drawing/2014/main" id="{4CD4E881-EEF2-8ECD-C892-7874A1BBDFD0}"/>
+                  </a:ext>
+                </a:extLst>
+              </p:cNvPr>
+              <p:cNvSpPr/>
+              <p:nvPr/>
+            </p:nvSpPr>
+            <p:spPr>
+              <a:xfrm>
+                <a:off x="399079" y="1028192"/>
+                <a:ext cx="266420" cy="255177"/>
+              </a:xfrm>
+              <a:prstGeom prst="ellipse">
+                <a:avLst/>
+              </a:prstGeom>
+              <a:solidFill>
+                <a:srgbClr val="FFFF00"/>
+              </a:solidFill>
+              <a:ln>
+                <a:solidFill>
+                  <a:schemeClr val="tx1"/>
+                </a:solidFill>
+              </a:ln>
+            </p:spPr>
+            <p:style>
+              <a:lnRef idx="2">
+                <a:schemeClr val="accent1">
+                  <a:shade val="15000"/>
+                </a:schemeClr>
+              </a:lnRef>
+              <a:fillRef idx="1">
+                <a:schemeClr val="accent1"/>
+              </a:fillRef>
+              <a:effectRef idx="0">
+                <a:schemeClr val="accent1"/>
+              </a:effectRef>
+              <a:fontRef idx="minor">
+                <a:schemeClr val="lt1"/>
+              </a:fontRef>
+            </p:style>
+            <p:txBody>
+              <a:bodyPr rtlCol="0" anchor="ctr"/>
+              <a:lstStyle/>
+              <a:p>
+                <a:pPr algn="ctr"/>
+                <a:r>
+                  <a:rPr lang="en-US" altLang="ko-KR" sz="1600" b="1">
+                    <a:solidFill>
+                      <a:schemeClr val="tx1"/>
+                    </a:solidFill>
+                  </a:rPr>
+                  <a:t>3</a:t>
+                </a:r>
+                <a:endParaRPr lang="ko-KR" altLang="en-US" sz="1600" b="1">
+                  <a:solidFill>
+                    <a:schemeClr val="tx1"/>
+                  </a:solidFill>
+                </a:endParaRPr>
+              </a:p>
+            </p:txBody>
+          </p:sp>
+          <p:sp>
+            <p:nvSpPr>
+              <p:cNvPr id="73" name="TextBox 72">
+                <a:extLst>
+                  <a:ext uri="{FF2B5EF4-FFF2-40B4-BE49-F238E27FC236}">
+                    <a16:creationId xmlns:a16="http://schemas.microsoft.com/office/drawing/2014/main" id="{D4917FFB-3CF5-FF71-BD31-6B923DCF5DE3}"/>
+                  </a:ext>
+                </a:extLst>
+              </p:cNvPr>
+              <p:cNvSpPr txBox="1"/>
+              <p:nvPr/>
+            </p:nvSpPr>
+            <p:spPr>
+              <a:xfrm>
+                <a:off x="807198" y="955217"/>
+                <a:ext cx="8366567" cy="307777"/>
+              </a:xfrm>
+              <a:prstGeom prst="rect">
+                <a:avLst/>
+              </a:prstGeom>
+              <a:noFill/>
+            </p:spPr>
+            <p:txBody>
+              <a:bodyPr wrap="square" rtlCol="0">
+                <a:spAutoFit/>
+              </a:bodyPr>
+              <a:lstStyle/>
+              <a:p>
+                <a:r>
+                  <a:rPr lang="en-US" altLang="ko-KR" sz="1400"/>
+                  <a:t>Start</a:t>
+                </a:r>
+                <a:r>
+                  <a:rPr lang="ko-KR" altLang="en-US" sz="1400"/>
+                  <a:t>에서 </a:t>
+                </a:r>
+                <a:r>
+                  <a:rPr lang="en-US" altLang="ko-KR" sz="1400"/>
+                  <a:t>rx_data update,</a:t>
+                </a:r>
+                <a:r>
+                  <a:rPr lang="ko-KR" altLang="en-US" sz="1400"/>
+                  <a:t> 이 후 </a:t>
+                </a:r>
+                <a:r>
+                  <a:rPr lang="en-US" altLang="ko-KR" sz="1400"/>
+                  <a:t>shift </a:t>
+                </a:r>
+                <a:r>
+                  <a:rPr lang="ko-KR" altLang="en-US" sz="1400"/>
+                  <a:t>되면서 </a:t>
+                </a:r>
+                <a:r>
+                  <a:rPr lang="en-US" altLang="ko-KR" sz="1400"/>
+                  <a:t>tx line</a:t>
+                </a:r>
+                <a:r>
+                  <a:rPr lang="ko-KR" altLang="en-US" sz="1400"/>
+                  <a:t>으로 데이터 전송</a:t>
+                </a:r>
+              </a:p>
+            </p:txBody>
+          </p:sp>
+        </p:grpSp>
+        <p:grpSp>
+          <p:nvGrpSpPr>
+            <p:cNvPr id="74" name="그룹 73">
+              <a:extLst>
+                <a:ext uri="{FF2B5EF4-FFF2-40B4-BE49-F238E27FC236}">
+                  <a16:creationId xmlns:a16="http://schemas.microsoft.com/office/drawing/2014/main" id="{53764E1F-FC96-AD9D-9812-C14AED4884B5}"/>
+                </a:ext>
+              </a:extLst>
+            </p:cNvPr>
+            <p:cNvGrpSpPr/>
+            <p:nvPr/>
+          </p:nvGrpSpPr>
+          <p:grpSpPr>
+            <a:xfrm>
+              <a:off x="1426891" y="2220592"/>
+              <a:ext cx="4525327" cy="510415"/>
+              <a:chOff x="399079" y="904669"/>
+              <a:chExt cx="4525327" cy="510415"/>
+            </a:xfrm>
+          </p:grpSpPr>
+          <p:sp>
+            <p:nvSpPr>
+              <p:cNvPr id="75" name="타원 74">
+                <a:extLst>
+                  <a:ext uri="{FF2B5EF4-FFF2-40B4-BE49-F238E27FC236}">
+                    <a16:creationId xmlns:a16="http://schemas.microsoft.com/office/drawing/2014/main" id="{03780A9B-94E5-57AB-C6EE-D554219F1155}"/>
+                  </a:ext>
+                </a:extLst>
+              </p:cNvPr>
+              <p:cNvSpPr/>
+              <p:nvPr/>
+            </p:nvSpPr>
+            <p:spPr>
+              <a:xfrm>
+                <a:off x="399079" y="1028192"/>
+                <a:ext cx="266420" cy="255177"/>
+              </a:xfrm>
+              <a:prstGeom prst="ellipse">
+                <a:avLst/>
+              </a:prstGeom>
+              <a:solidFill>
+                <a:srgbClr val="FFFF00"/>
+              </a:solidFill>
+              <a:ln>
+                <a:solidFill>
+                  <a:schemeClr val="tx1"/>
+                </a:solidFill>
+              </a:ln>
+            </p:spPr>
+            <p:style>
+              <a:lnRef idx="2">
+                <a:schemeClr val="accent1">
+                  <a:shade val="15000"/>
+                </a:schemeClr>
+              </a:lnRef>
+              <a:fillRef idx="1">
+                <a:schemeClr val="accent1"/>
+              </a:fillRef>
+              <a:effectRef idx="0">
+                <a:schemeClr val="accent1"/>
+              </a:effectRef>
+              <a:fontRef idx="minor">
+                <a:schemeClr val="lt1"/>
+              </a:fontRef>
+            </p:style>
+            <p:txBody>
+              <a:bodyPr rtlCol="0" anchor="ctr"/>
+              <a:lstStyle/>
+              <a:p>
+                <a:pPr algn="ctr"/>
+                <a:r>
+                  <a:rPr lang="en-US" altLang="ko-KR" sz="1600" b="1">
+                    <a:solidFill>
+                      <a:schemeClr val="tx1"/>
+                    </a:solidFill>
+                  </a:rPr>
+                  <a:t>4</a:t>
+                </a:r>
+                <a:endParaRPr lang="ko-KR" altLang="en-US" sz="1600" b="1">
+                  <a:solidFill>
+                    <a:schemeClr val="tx1"/>
+                  </a:solidFill>
+                </a:endParaRPr>
+              </a:p>
+            </p:txBody>
+          </p:sp>
+          <p:sp>
+            <p:nvSpPr>
+              <p:cNvPr id="76" name="TextBox 75">
+                <a:extLst>
+                  <a:ext uri="{FF2B5EF4-FFF2-40B4-BE49-F238E27FC236}">
+                    <a16:creationId xmlns:a16="http://schemas.microsoft.com/office/drawing/2014/main" id="{2E72A0A5-5B95-F885-C6E6-D74456868940}"/>
+                  </a:ext>
+                </a:extLst>
+              </p:cNvPr>
+              <p:cNvSpPr txBox="1"/>
+              <p:nvPr/>
+            </p:nvSpPr>
+            <p:spPr>
+              <a:xfrm>
+                <a:off x="807198" y="904669"/>
+                <a:ext cx="4117208" cy="510415"/>
+              </a:xfrm>
+              <a:prstGeom prst="rect">
+                <a:avLst/>
+              </a:prstGeom>
+              <a:noFill/>
+            </p:spPr>
+            <p:txBody>
+              <a:bodyPr wrap="square" rtlCol="0">
+                <a:spAutoFit/>
+              </a:bodyPr>
+              <a:lstStyle/>
+              <a:p>
+                <a:r>
+                  <a:rPr lang="en-US" altLang="ko-KR" sz="1400"/>
+                  <a:t>STOP state</a:t>
+                </a:r>
+                <a:r>
+                  <a:rPr lang="ko-KR" altLang="en-US" sz="1400"/>
+                  <a:t>에서 </a:t>
+                </a:r>
+                <a:r>
+                  <a:rPr lang="en-US" altLang="ko-KR" sz="1400"/>
+                  <a:t>tx signal assert </a:t>
+                </a:r>
+                <a:endParaRPr lang="ko-KR" altLang="en-US" sz="1400"/>
+              </a:p>
+            </p:txBody>
+          </p:sp>
+        </p:grpSp>
+      </p:grpSp>
+    </p:spTree>
+    <p:extLst>
+      <p:ext uri="{BB962C8B-B14F-4D97-AF65-F5344CB8AC3E}">
+        <p14:creationId xmlns:p14="http://schemas.microsoft.com/office/powerpoint/2010/main" val="3511853303"/>
+      </p:ext>
+    </p:extLst>
+  </p:cSld>
+  <p:clrMapOvr>
+    <a:masterClrMapping/>
+  </p:clrMapOvr>
+</p:sld>
+</file>
+
+<file path=ppt/slides/slide5.xml><?xml version="1.0" encoding="utf-8"?>
 <p:sld xmlns:a="http://schemas.openxmlformats.org/drawingml/2006/main" xmlns:r="http://schemas.openxmlformats.org/officeDocument/2006/relationships" xmlns:p="http://schemas.openxmlformats.org/presentationml/2006/main">
   <p:cSld>
     <p:spTree>
@@ -7602,15 +10285,23 @@
             </a:r>
             <a:r>
               <a:rPr lang="en-US" altLang="ko-KR"/>
-              <a:t>– RX </a:t>
+              <a:t>– Rx_done </a:t>
             </a:r>
             <a:r>
               <a:rPr lang="ko-KR" altLang="en-US"/>
-              <a:t>동작 이 후</a:t>
+              <a:t>신호 이 후 </a:t>
             </a:r>
             <a:r>
               <a:rPr lang="en-US" altLang="ko-KR"/>
-              <a:t> TX loopback flow</a:t>
+              <a:t>Tx </a:t>
+            </a:r>
+            <a:r>
+              <a:rPr lang="ko-KR" altLang="en-US"/>
+              <a:t>초기 단계</a:t>
+            </a:r>
+            <a:r>
+              <a:rPr lang="en-US" altLang="ko-KR"/>
+              <a:t> flow</a:t>
             </a:r>
             <a:r>
               <a:rPr lang="ko-KR" altLang="en-US"/>
@@ -7638,7 +10329,7 @@
         <p:spPr>
           <a:xfrm>
             <a:off x="1021860" y="914037"/>
-            <a:ext cx="7589898" cy="646331"/>
+            <a:ext cx="556563" cy="369332"/>
           </a:xfrm>
           <a:prstGeom prst="rect">
             <a:avLst/>
@@ -7653,61 +10344,7 @@
           <a:p>
             <a:r>
               <a:rPr lang="en-US" altLang="ko-KR"/>
-              <a:t>b_tick_cnt == 15 </a:t>
-            </a:r>
-            <a:r>
-              <a:rPr lang="ko-KR" altLang="en-US"/>
-              <a:t>구간에서 </a:t>
-            </a:r>
-            <a:r>
-              <a:rPr lang="en-US" altLang="ko-KR"/>
-              <a:t>Data shift </a:t>
-            </a:r>
-            <a:r>
-              <a:rPr lang="ko-KR" altLang="en-US"/>
-              <a:t>및 </a:t>
-            </a:r>
-            <a:r>
-              <a:rPr lang="en-US" altLang="ko-KR"/>
-              <a:t>Stop </a:t>
-            </a:r>
-            <a:r>
-              <a:rPr lang="ko-KR" altLang="en-US"/>
-              <a:t>구간에서 </a:t>
-            </a:r>
-            <a:r>
-              <a:rPr lang="en-US" altLang="ko-KR"/>
-              <a:t>8bit Data </a:t>
-            </a:r>
-            <a:r>
-              <a:rPr lang="ko-KR" altLang="en-US"/>
-              <a:t>수신</a:t>
-            </a:r>
-            <a:r>
-              <a:rPr lang="en-US" altLang="ko-KR"/>
-              <a:t> </a:t>
-            </a:r>
-          </a:p>
-          <a:p>
-            <a:r>
-              <a:rPr lang="en-US" altLang="ko-KR"/>
-              <a:t>Stop state</a:t>
-            </a:r>
-            <a:r>
-              <a:rPr lang="ko-KR" altLang="en-US"/>
-              <a:t> </a:t>
-            </a:r>
-            <a:r>
-              <a:rPr lang="en-US" altLang="ko-KR"/>
-              <a:t>asm chart </a:t>
-            </a:r>
-            <a:r>
-              <a:rPr lang="ko-KR" altLang="en-US"/>
-              <a:t>만족</a:t>
-            </a:r>
-            <a:r>
-              <a:rPr lang="en-US" altLang="ko-KR"/>
-              <a:t> </a:t>
+              <a:t>DS </a:t>
             </a:r>
             <a:endParaRPr lang="ko-KR" altLang="en-US"/>
           </a:p>
@@ -7748,82 +10385,1766 @@
           </a:p>
         </p:txBody>
       </p:sp>
-    </p:spTree>
-    <p:extLst>
-      <p:ext uri="{BB962C8B-B14F-4D97-AF65-F5344CB8AC3E}">
-        <p14:creationId xmlns:p14="http://schemas.microsoft.com/office/powerpoint/2010/main" val="3596761061"/>
-      </p:ext>
-    </p:extLst>
-  </p:cSld>
-  <p:clrMapOvr>
-    <a:masterClrMapping/>
-  </p:clrMapOvr>
-</p:sld>
-</file>
-
-<file path=ppt/slides/slide4.xml><?xml version="1.0" encoding="utf-8"?>
-<p:sld xmlns:a="http://schemas.openxmlformats.org/drawingml/2006/main" xmlns:r="http://schemas.openxmlformats.org/officeDocument/2006/relationships" xmlns:p="http://schemas.openxmlformats.org/presentationml/2006/main">
-  <p:cSld>
-    <p:spTree>
-      <p:nvGrpSpPr>
-        <p:cNvPr id="1" name=""/>
-        <p:cNvGrpSpPr/>
-        <p:nvPr/>
-      </p:nvGrpSpPr>
-      <p:grpSpPr>
-        <a:xfrm>
-          <a:off x="0" y="0"/>
-          <a:ext cx="0" cy="0"/>
-          <a:chOff x="0" y="0"/>
-          <a:chExt cx="0" cy="0"/>
-        </a:xfrm>
-      </p:grpSpPr>
       <p:sp>
         <p:nvSpPr>
-          <p:cNvPr id="2" name="제목 1">
+          <p:cNvPr id="17" name="직사각형 16">
             <a:extLst>
               <a:ext uri="{FF2B5EF4-FFF2-40B4-BE49-F238E27FC236}">
-                <a16:creationId xmlns:a16="http://schemas.microsoft.com/office/drawing/2014/main" id="{87E62418-833D-D523-9655-8DA8355AD446}"/>
+                <a16:creationId xmlns:a16="http://schemas.microsoft.com/office/drawing/2014/main" id="{22FC1024-3C94-A74A-31AE-4DEC09854663}"/>
               </a:ext>
             </a:extLst>
           </p:cNvPr>
-          <p:cNvSpPr>
-            <a:spLocks noGrp="1"/>
-          </p:cNvSpPr>
-          <p:nvPr>
-            <p:ph type="title"/>
-          </p:nvPr>
+          <p:cNvSpPr/>
+          <p:nvPr/>
         </p:nvSpPr>
-        <p:spPr/>
+        <p:spPr>
+          <a:xfrm>
+            <a:off x="5646281" y="2255372"/>
+            <a:ext cx="708793" cy="1163487"/>
+          </a:xfrm>
+          <a:prstGeom prst="rect">
+            <a:avLst/>
+          </a:prstGeom>
+          <a:noFill/>
+          <a:ln>
+            <a:solidFill>
+              <a:srgbClr val="FFC000"/>
+            </a:solidFill>
+          </a:ln>
+        </p:spPr>
+        <p:style>
+          <a:lnRef idx="2">
+            <a:schemeClr val="accent1">
+              <a:shade val="15000"/>
+            </a:schemeClr>
+          </a:lnRef>
+          <a:fillRef idx="1">
+            <a:schemeClr val="accent1"/>
+          </a:fillRef>
+          <a:effectRef idx="0">
+            <a:schemeClr val="accent1"/>
+          </a:effectRef>
+          <a:fontRef idx="minor">
+            <a:schemeClr val="lt1"/>
+          </a:fontRef>
+        </p:style>
         <p:txBody>
-          <a:bodyPr/>
+          <a:bodyPr rtlCol="0" anchor="ctr"/>
           <a:lstStyle/>
           <a:p>
+            <a:pPr algn="ctr"/>
             <a:endParaRPr lang="ko-KR" altLang="en-US"/>
           </a:p>
         </p:txBody>
       </p:sp>
       <p:sp>
         <p:nvSpPr>
-          <p:cNvPr id="3" name="내용 개체 틀 2">
+          <p:cNvPr id="19" name="TextBox 18">
             <a:extLst>
               <a:ext uri="{FF2B5EF4-FFF2-40B4-BE49-F238E27FC236}">
-                <a16:creationId xmlns:a16="http://schemas.microsoft.com/office/drawing/2014/main" id="{0E3E40DB-7ECF-C947-FF8E-1037A3D12870}"/>
+                <a16:creationId xmlns:a16="http://schemas.microsoft.com/office/drawing/2014/main" id="{CF37BA7A-1D6B-DB99-F517-F1021743695A}"/>
               </a:ext>
             </a:extLst>
           </p:cNvPr>
-          <p:cNvSpPr>
-            <a:spLocks noGrp="1"/>
-          </p:cNvSpPr>
-          <p:nvPr>
-            <p:ph idx="1"/>
-          </p:nvPr>
+          <p:cNvSpPr txBox="1"/>
+          <p:nvPr/>
         </p:nvSpPr>
-        <p:spPr/>
+        <p:spPr>
+          <a:xfrm>
+            <a:off x="5984977" y="2207409"/>
+            <a:ext cx="492504" cy="293711"/>
+          </a:xfrm>
+          <a:prstGeom prst="rect">
+            <a:avLst/>
+          </a:prstGeom>
+          <a:noFill/>
+        </p:spPr>
         <p:txBody>
-          <a:bodyPr/>
+          <a:bodyPr wrap="square" rtlCol="0">
+            <a:spAutoFit/>
+          </a:bodyPr>
           <a:lstStyle/>
           <a:p>
+            <a:r>
+              <a:rPr lang="en-US" altLang="ko-KR">
+                <a:solidFill>
+                  <a:srgbClr val="FFC000"/>
+                </a:solidFill>
+              </a:rPr>
+              <a:t>Rx</a:t>
+            </a:r>
+            <a:endParaRPr lang="ko-KR" altLang="en-US">
+              <a:solidFill>
+                <a:srgbClr val="FFC000"/>
+              </a:solidFill>
+            </a:endParaRPr>
+          </a:p>
+        </p:txBody>
+      </p:sp>
+      <p:sp>
+        <p:nvSpPr>
+          <p:cNvPr id="28" name="TextBox 27">
+            <a:extLst>
+              <a:ext uri="{FF2B5EF4-FFF2-40B4-BE49-F238E27FC236}">
+                <a16:creationId xmlns:a16="http://schemas.microsoft.com/office/drawing/2014/main" id="{B5082E19-44F2-21D4-9B0A-C1DD0763373A}"/>
+              </a:ext>
+            </a:extLst>
+          </p:cNvPr>
+          <p:cNvSpPr txBox="1"/>
+          <p:nvPr/>
+        </p:nvSpPr>
+        <p:spPr>
+          <a:xfrm>
+            <a:off x="6008795" y="3358813"/>
+            <a:ext cx="492504" cy="369332"/>
+          </a:xfrm>
+          <a:prstGeom prst="rect">
+            <a:avLst/>
+          </a:prstGeom>
+          <a:noFill/>
+        </p:spPr>
+        <p:txBody>
+          <a:bodyPr wrap="square" rtlCol="0">
+            <a:spAutoFit/>
+          </a:bodyPr>
+          <a:lstStyle/>
+          <a:p>
+            <a:r>
+              <a:rPr lang="en-US" altLang="ko-KR">
+                <a:solidFill>
+                  <a:srgbClr val="FFFF00"/>
+                </a:solidFill>
+              </a:rPr>
+              <a:t>Tx</a:t>
+            </a:r>
+            <a:endParaRPr lang="ko-KR" altLang="en-US">
+              <a:solidFill>
+                <a:srgbClr val="FFFF00"/>
+              </a:solidFill>
+            </a:endParaRPr>
+          </a:p>
+        </p:txBody>
+      </p:sp>
+      <p:grpSp>
+        <p:nvGrpSpPr>
+          <p:cNvPr id="40" name="그룹 39">
+            <a:extLst>
+              <a:ext uri="{FF2B5EF4-FFF2-40B4-BE49-F238E27FC236}">
+                <a16:creationId xmlns:a16="http://schemas.microsoft.com/office/drawing/2014/main" id="{4B6D4DBB-6BE5-82E2-C2C9-B8B593D455D6}"/>
+              </a:ext>
+            </a:extLst>
+          </p:cNvPr>
+          <p:cNvGrpSpPr/>
+          <p:nvPr/>
+        </p:nvGrpSpPr>
+        <p:grpSpPr>
+          <a:xfrm>
+            <a:off x="500821" y="1722946"/>
+            <a:ext cx="6423965" cy="2977125"/>
+            <a:chOff x="1098046" y="1498603"/>
+            <a:chExt cx="9714121" cy="3860794"/>
+          </a:xfrm>
+        </p:grpSpPr>
+        <p:grpSp>
+          <p:nvGrpSpPr>
+            <p:cNvPr id="41" name="그룹 40">
+              <a:extLst>
+                <a:ext uri="{FF2B5EF4-FFF2-40B4-BE49-F238E27FC236}">
+                  <a16:creationId xmlns:a16="http://schemas.microsoft.com/office/drawing/2014/main" id="{77BE4B92-957E-ACF0-F926-15D9F87AE42F}"/>
+                </a:ext>
+              </a:extLst>
+            </p:cNvPr>
+            <p:cNvGrpSpPr/>
+            <p:nvPr/>
+          </p:nvGrpSpPr>
+          <p:grpSpPr>
+            <a:xfrm>
+              <a:off x="1098046" y="1498603"/>
+              <a:ext cx="9714121" cy="3860794"/>
+              <a:chOff x="851485" y="1464469"/>
+              <a:chExt cx="9714121" cy="3860794"/>
+            </a:xfrm>
+          </p:grpSpPr>
+          <p:pic>
+            <p:nvPicPr>
+              <p:cNvPr id="66" name="그림 65">
+                <a:extLst>
+                  <a:ext uri="{FF2B5EF4-FFF2-40B4-BE49-F238E27FC236}">
+                    <a16:creationId xmlns:a16="http://schemas.microsoft.com/office/drawing/2014/main" id="{00CFD0E1-E136-7250-43E4-15497CC1F616}"/>
+                  </a:ext>
+                </a:extLst>
+              </p:cNvPr>
+              <p:cNvPicPr>
+                <a:picLocks noChangeAspect="1"/>
+              </p:cNvPicPr>
+              <p:nvPr/>
+            </p:nvPicPr>
+            <p:blipFill>
+              <a:blip r:embed="rId2"/>
+              <a:stretch>
+                <a:fillRect/>
+              </a:stretch>
+            </p:blipFill>
+            <p:spPr>
+              <a:xfrm>
+                <a:off x="851485" y="1464469"/>
+                <a:ext cx="9714121" cy="3860794"/>
+              </a:xfrm>
+              <a:prstGeom prst="rect">
+                <a:avLst/>
+              </a:prstGeom>
+            </p:spPr>
+          </p:pic>
+          <p:sp>
+            <p:nvSpPr>
+              <p:cNvPr id="68" name="직사각형 67">
+                <a:extLst>
+                  <a:ext uri="{FF2B5EF4-FFF2-40B4-BE49-F238E27FC236}">
+                    <a16:creationId xmlns:a16="http://schemas.microsoft.com/office/drawing/2014/main" id="{EFB19F55-27A4-4717-8E9F-83DAE17CB7AD}"/>
+                  </a:ext>
+                </a:extLst>
+              </p:cNvPr>
+              <p:cNvSpPr/>
+              <p:nvPr/>
+            </p:nvSpPr>
+            <p:spPr>
+              <a:xfrm>
+                <a:off x="855805" y="1778090"/>
+                <a:ext cx="1143169" cy="1718109"/>
+              </a:xfrm>
+              <a:prstGeom prst="rect">
+                <a:avLst/>
+              </a:prstGeom>
+              <a:noFill/>
+              <a:ln>
+                <a:solidFill>
+                  <a:srgbClr val="FFC000"/>
+                </a:solidFill>
+              </a:ln>
+            </p:spPr>
+            <p:style>
+              <a:lnRef idx="2">
+                <a:schemeClr val="accent1">
+                  <a:shade val="15000"/>
+                </a:schemeClr>
+              </a:lnRef>
+              <a:fillRef idx="1">
+                <a:schemeClr val="accent1"/>
+              </a:fillRef>
+              <a:effectRef idx="0">
+                <a:schemeClr val="accent1"/>
+              </a:effectRef>
+              <a:fontRef idx="minor">
+                <a:schemeClr val="lt1"/>
+              </a:fontRef>
+            </p:style>
+            <p:txBody>
+              <a:bodyPr rtlCol="0" anchor="ctr"/>
+              <a:lstStyle/>
+              <a:p>
+                <a:pPr algn="ctr"/>
+                <a:endParaRPr lang="ko-KR" altLang="en-US" sz="1400"/>
+              </a:p>
+            </p:txBody>
+          </p:sp>
+          <p:sp>
+            <p:nvSpPr>
+              <p:cNvPr id="69" name="직사각형 68">
+                <a:extLst>
+                  <a:ext uri="{FF2B5EF4-FFF2-40B4-BE49-F238E27FC236}">
+                    <a16:creationId xmlns:a16="http://schemas.microsoft.com/office/drawing/2014/main" id="{F11B2BDD-1F1C-0C77-6792-7CA36F578A66}"/>
+                  </a:ext>
+                </a:extLst>
+              </p:cNvPr>
+              <p:cNvSpPr/>
+              <p:nvPr/>
+            </p:nvSpPr>
+            <p:spPr>
+              <a:xfrm>
+                <a:off x="864832" y="3529756"/>
+                <a:ext cx="1143169" cy="1778503"/>
+              </a:xfrm>
+              <a:prstGeom prst="rect">
+                <a:avLst/>
+              </a:prstGeom>
+              <a:noFill/>
+              <a:ln>
+                <a:solidFill>
+                  <a:srgbClr val="FFFF00"/>
+                </a:solidFill>
+              </a:ln>
+            </p:spPr>
+            <p:style>
+              <a:lnRef idx="2">
+                <a:schemeClr val="accent1">
+                  <a:shade val="15000"/>
+                </a:schemeClr>
+              </a:lnRef>
+              <a:fillRef idx="1">
+                <a:schemeClr val="accent1"/>
+              </a:fillRef>
+              <a:effectRef idx="0">
+                <a:schemeClr val="accent1"/>
+              </a:effectRef>
+              <a:fontRef idx="minor">
+                <a:schemeClr val="lt1"/>
+              </a:fontRef>
+            </p:style>
+            <p:txBody>
+              <a:bodyPr rtlCol="0" anchor="ctr"/>
+              <a:lstStyle/>
+              <a:p>
+                <a:pPr algn="ctr"/>
+                <a:endParaRPr lang="ko-KR" altLang="en-US" sz="1400"/>
+              </a:p>
+            </p:txBody>
+          </p:sp>
+          <p:sp>
+            <p:nvSpPr>
+              <p:cNvPr id="70" name="TextBox 69">
+                <a:extLst>
+                  <a:ext uri="{FF2B5EF4-FFF2-40B4-BE49-F238E27FC236}">
+                    <a16:creationId xmlns:a16="http://schemas.microsoft.com/office/drawing/2014/main" id="{34344A4C-AC23-1962-EE14-F1E7FEAC30B4}"/>
+                  </a:ext>
+                </a:extLst>
+              </p:cNvPr>
+              <p:cNvSpPr txBox="1"/>
+              <p:nvPr/>
+            </p:nvSpPr>
+            <p:spPr>
+              <a:xfrm>
+                <a:off x="1427388" y="1691786"/>
+                <a:ext cx="794330" cy="399131"/>
+              </a:xfrm>
+              <a:prstGeom prst="rect">
+                <a:avLst/>
+              </a:prstGeom>
+              <a:noFill/>
+            </p:spPr>
+            <p:txBody>
+              <a:bodyPr wrap="square" rtlCol="0">
+                <a:spAutoFit/>
+              </a:bodyPr>
+              <a:lstStyle/>
+              <a:p>
+                <a:r>
+                  <a:rPr lang="en-US" altLang="ko-KR" sz="1400">
+                    <a:solidFill>
+                      <a:srgbClr val="FFC000"/>
+                    </a:solidFill>
+                  </a:rPr>
+                  <a:t>Rx</a:t>
+                </a:r>
+                <a:endParaRPr lang="ko-KR" altLang="en-US" sz="1400">
+                  <a:solidFill>
+                    <a:srgbClr val="FFC000"/>
+                  </a:solidFill>
+                </a:endParaRPr>
+              </a:p>
+            </p:txBody>
+          </p:sp>
+          <p:sp>
+            <p:nvSpPr>
+              <p:cNvPr id="71" name="TextBox 70">
+                <a:extLst>
+                  <a:ext uri="{FF2B5EF4-FFF2-40B4-BE49-F238E27FC236}">
+                    <a16:creationId xmlns:a16="http://schemas.microsoft.com/office/drawing/2014/main" id="{C8EE88C8-A718-E757-E5DE-E517DBC0B691}"/>
+                  </a:ext>
+                </a:extLst>
+              </p:cNvPr>
+              <p:cNvSpPr txBox="1"/>
+              <p:nvPr/>
+            </p:nvSpPr>
+            <p:spPr>
+              <a:xfrm>
+                <a:off x="1461955" y="3447506"/>
+                <a:ext cx="794330" cy="399131"/>
+              </a:xfrm>
+              <a:prstGeom prst="rect">
+                <a:avLst/>
+              </a:prstGeom>
+              <a:noFill/>
+            </p:spPr>
+            <p:txBody>
+              <a:bodyPr wrap="square" rtlCol="0">
+                <a:spAutoFit/>
+              </a:bodyPr>
+              <a:lstStyle/>
+              <a:p>
+                <a:r>
+                  <a:rPr lang="en-US" altLang="ko-KR" sz="1400">
+                    <a:solidFill>
+                      <a:srgbClr val="FFFF00"/>
+                    </a:solidFill>
+                  </a:rPr>
+                  <a:t>Tx</a:t>
+                </a:r>
+                <a:endParaRPr lang="ko-KR" altLang="en-US" sz="1400">
+                  <a:solidFill>
+                    <a:srgbClr val="FFFF00"/>
+                  </a:solidFill>
+                </a:endParaRPr>
+              </a:p>
+            </p:txBody>
+          </p:sp>
+        </p:grpSp>
+        <p:cxnSp>
+          <p:nvCxnSpPr>
+            <p:cNvPr id="42" name="직선 화살표 연결선 41">
+              <a:extLst>
+                <a:ext uri="{FF2B5EF4-FFF2-40B4-BE49-F238E27FC236}">
+                  <a16:creationId xmlns:a16="http://schemas.microsoft.com/office/drawing/2014/main" id="{488CF448-F113-8BF0-C311-4EE9297FFC2A}"/>
+                </a:ext>
+              </a:extLst>
+            </p:cNvPr>
+            <p:cNvCxnSpPr/>
+            <p:nvPr/>
+          </p:nvCxnSpPr>
+          <p:spPr>
+            <a:xfrm>
+              <a:off x="6266688" y="2926080"/>
+              <a:ext cx="0" cy="737616"/>
+            </a:xfrm>
+            <a:prstGeom prst="straightConnector1">
+              <a:avLst/>
+            </a:prstGeom>
+            <a:ln>
+              <a:solidFill>
+                <a:srgbClr val="FF0000"/>
+              </a:solidFill>
+              <a:tailEnd type="triangle"/>
+            </a:ln>
+          </p:spPr>
+          <p:style>
+            <a:lnRef idx="2">
+              <a:schemeClr val="accent1"/>
+            </a:lnRef>
+            <a:fillRef idx="0">
+              <a:schemeClr val="accent1"/>
+            </a:fillRef>
+            <a:effectRef idx="1">
+              <a:schemeClr val="accent1"/>
+            </a:effectRef>
+            <a:fontRef idx="minor">
+              <a:schemeClr val="tx1"/>
+            </a:fontRef>
+          </p:style>
+        </p:cxnSp>
+        <p:grpSp>
+          <p:nvGrpSpPr>
+            <p:cNvPr id="43" name="그룹 42">
+              <a:extLst>
+                <a:ext uri="{FF2B5EF4-FFF2-40B4-BE49-F238E27FC236}">
+                  <a16:creationId xmlns:a16="http://schemas.microsoft.com/office/drawing/2014/main" id="{5912F6DE-6EC1-99D5-08F5-20437265ACE6}"/>
+                </a:ext>
+              </a:extLst>
+            </p:cNvPr>
+            <p:cNvGrpSpPr/>
+            <p:nvPr/>
+          </p:nvGrpSpPr>
+          <p:grpSpPr>
+            <a:xfrm>
+              <a:off x="4603240" y="3499882"/>
+              <a:ext cx="1969007" cy="286009"/>
+              <a:chOff x="5940772" y="3417799"/>
+              <a:chExt cx="1969007" cy="286009"/>
+            </a:xfrm>
+          </p:grpSpPr>
+          <p:sp>
+            <p:nvSpPr>
+              <p:cNvPr id="64" name="TextBox 63">
+                <a:extLst>
+                  <a:ext uri="{FF2B5EF4-FFF2-40B4-BE49-F238E27FC236}">
+                    <a16:creationId xmlns:a16="http://schemas.microsoft.com/office/drawing/2014/main" id="{1771CFCB-D40E-17F7-9953-4880F4E47450}"/>
+                  </a:ext>
+                </a:extLst>
+              </p:cNvPr>
+              <p:cNvSpPr txBox="1"/>
+              <p:nvPr/>
+            </p:nvSpPr>
+            <p:spPr>
+              <a:xfrm>
+                <a:off x="5940772" y="3444371"/>
+                <a:ext cx="1969007" cy="259437"/>
+              </a:xfrm>
+              <a:prstGeom prst="rect">
+                <a:avLst/>
+              </a:prstGeom>
+              <a:noFill/>
+            </p:spPr>
+            <p:txBody>
+              <a:bodyPr wrap="square" rtlCol="0">
+                <a:spAutoFit/>
+              </a:bodyPr>
+              <a:lstStyle/>
+              <a:p>
+                <a:r>
+                  <a:rPr lang="en-US" altLang="ko-KR" sz="700">
+                    <a:highlight>
+                      <a:srgbClr val="FFFF00"/>
+                    </a:highlight>
+                  </a:rPr>
+                  <a:t>rx_done </a:t>
+                </a:r>
+                <a:r>
+                  <a:rPr lang="ko-KR" altLang="en-US" sz="700">
+                    <a:highlight>
+                      <a:srgbClr val="FFFF00"/>
+                    </a:highlight>
+                  </a:rPr>
+                  <a:t>→ </a:t>
+                </a:r>
+                <a:r>
+                  <a:rPr lang="en-US" altLang="ko-KR" sz="700">
+                    <a:highlight>
+                      <a:srgbClr val="FFFF00"/>
+                    </a:highlight>
+                  </a:rPr>
+                  <a:t>tx_start </a:t>
+                </a:r>
+                <a:endParaRPr lang="ko-KR" altLang="en-US" sz="700">
+                  <a:highlight>
+                    <a:srgbClr val="FFFF00"/>
+                  </a:highlight>
+                </a:endParaRPr>
+              </a:p>
+            </p:txBody>
+          </p:sp>
+          <p:sp>
+            <p:nvSpPr>
+              <p:cNvPr id="65" name="타원 64">
+                <a:extLst>
+                  <a:ext uri="{FF2B5EF4-FFF2-40B4-BE49-F238E27FC236}">
+                    <a16:creationId xmlns:a16="http://schemas.microsoft.com/office/drawing/2014/main" id="{D5EFAC41-08B8-EDFF-CFAD-2B81902484A1}"/>
+                  </a:ext>
+                </a:extLst>
+              </p:cNvPr>
+              <p:cNvSpPr/>
+              <p:nvPr/>
+            </p:nvSpPr>
+            <p:spPr>
+              <a:xfrm>
+                <a:off x="5963439" y="3417799"/>
+                <a:ext cx="152399" cy="128015"/>
+              </a:xfrm>
+              <a:prstGeom prst="ellipse">
+                <a:avLst/>
+              </a:prstGeom>
+              <a:solidFill>
+                <a:srgbClr val="FFFF00"/>
+              </a:solidFill>
+              <a:ln>
+                <a:noFill/>
+              </a:ln>
+            </p:spPr>
+            <p:style>
+              <a:lnRef idx="2">
+                <a:schemeClr val="accent1">
+                  <a:shade val="15000"/>
+                </a:schemeClr>
+              </a:lnRef>
+              <a:fillRef idx="1">
+                <a:schemeClr val="accent1"/>
+              </a:fillRef>
+              <a:effectRef idx="0">
+                <a:schemeClr val="accent1"/>
+              </a:effectRef>
+              <a:fontRef idx="minor">
+                <a:schemeClr val="lt1"/>
+              </a:fontRef>
+            </p:style>
+            <p:txBody>
+              <a:bodyPr rtlCol="0" anchor="ctr"/>
+              <a:lstStyle/>
+              <a:p>
+                <a:pPr algn="ctr"/>
+                <a:r>
+                  <a:rPr lang="en-US" altLang="ko-KR" sz="900" b="1">
+                    <a:solidFill>
+                      <a:schemeClr val="tx1"/>
+                    </a:solidFill>
+                  </a:rPr>
+                  <a:t>1</a:t>
+                </a:r>
+                <a:endParaRPr lang="ko-KR" altLang="en-US" sz="900" b="1">
+                  <a:solidFill>
+                    <a:schemeClr val="tx1"/>
+                  </a:solidFill>
+                </a:endParaRPr>
+              </a:p>
+            </p:txBody>
+          </p:sp>
+        </p:grpSp>
+        <p:sp>
+          <p:nvSpPr>
+            <p:cNvPr id="44" name="타원 43">
+              <a:extLst>
+                <a:ext uri="{FF2B5EF4-FFF2-40B4-BE49-F238E27FC236}">
+                  <a16:creationId xmlns:a16="http://schemas.microsoft.com/office/drawing/2014/main" id="{43A43229-913B-89D1-9F69-95836296E66F}"/>
+                </a:ext>
+              </a:extLst>
+            </p:cNvPr>
+            <p:cNvSpPr/>
+            <p:nvPr/>
+          </p:nvSpPr>
+          <p:spPr>
+            <a:xfrm>
+              <a:off x="6075728" y="4161267"/>
+              <a:ext cx="152399" cy="128016"/>
+            </a:xfrm>
+            <a:prstGeom prst="ellipse">
+              <a:avLst/>
+            </a:prstGeom>
+            <a:solidFill>
+              <a:srgbClr val="FFFF00"/>
+            </a:solidFill>
+            <a:ln>
+              <a:noFill/>
+            </a:ln>
+          </p:spPr>
+          <p:style>
+            <a:lnRef idx="2">
+              <a:schemeClr val="accent1">
+                <a:shade val="15000"/>
+              </a:schemeClr>
+            </a:lnRef>
+            <a:fillRef idx="1">
+              <a:schemeClr val="accent1"/>
+            </a:fillRef>
+            <a:effectRef idx="0">
+              <a:schemeClr val="accent1"/>
+            </a:effectRef>
+            <a:fontRef idx="minor">
+              <a:schemeClr val="lt1"/>
+            </a:fontRef>
+          </p:style>
+          <p:txBody>
+            <a:bodyPr rtlCol="0" anchor="ctr"/>
+            <a:lstStyle/>
+            <a:p>
+              <a:pPr algn="ctr"/>
+              <a:r>
+                <a:rPr lang="en-US" altLang="ko-KR" sz="900" b="1">
+                  <a:solidFill>
+                    <a:schemeClr val="tx1"/>
+                  </a:solidFill>
+                </a:rPr>
+                <a:t>2</a:t>
+              </a:r>
+              <a:endParaRPr lang="ko-KR" altLang="en-US" sz="900" b="1">
+                <a:solidFill>
+                  <a:schemeClr val="tx1"/>
+                </a:solidFill>
+              </a:endParaRPr>
+            </a:p>
+          </p:txBody>
+        </p:sp>
+        <p:sp>
+          <p:nvSpPr>
+            <p:cNvPr id="45" name="타원 44">
+              <a:extLst>
+                <a:ext uri="{FF2B5EF4-FFF2-40B4-BE49-F238E27FC236}">
+                  <a16:creationId xmlns:a16="http://schemas.microsoft.com/office/drawing/2014/main" id="{7E456E41-2080-CC83-19A1-3812492F3A19}"/>
+                </a:ext>
+              </a:extLst>
+            </p:cNvPr>
+            <p:cNvSpPr/>
+            <p:nvPr/>
+          </p:nvSpPr>
+          <p:spPr>
+            <a:xfrm>
+              <a:off x="6095999" y="4916179"/>
+              <a:ext cx="152399" cy="128016"/>
+            </a:xfrm>
+            <a:prstGeom prst="ellipse">
+              <a:avLst/>
+            </a:prstGeom>
+            <a:solidFill>
+              <a:srgbClr val="FFFF00"/>
+            </a:solidFill>
+            <a:ln>
+              <a:noFill/>
+            </a:ln>
+          </p:spPr>
+          <p:style>
+            <a:lnRef idx="2">
+              <a:schemeClr val="accent1">
+                <a:shade val="15000"/>
+              </a:schemeClr>
+            </a:lnRef>
+            <a:fillRef idx="1">
+              <a:schemeClr val="accent1"/>
+            </a:fillRef>
+            <a:effectRef idx="0">
+              <a:schemeClr val="accent1"/>
+            </a:effectRef>
+            <a:fontRef idx="minor">
+              <a:schemeClr val="lt1"/>
+            </a:fontRef>
+          </p:style>
+          <p:txBody>
+            <a:bodyPr rtlCol="0" anchor="ctr"/>
+            <a:lstStyle/>
+            <a:p>
+              <a:pPr algn="ctr"/>
+              <a:r>
+                <a:rPr lang="en-US" altLang="ko-KR" sz="900" b="1">
+                  <a:solidFill>
+                    <a:schemeClr val="tx1"/>
+                  </a:solidFill>
+                </a:rPr>
+                <a:t>3</a:t>
+              </a:r>
+              <a:endParaRPr lang="ko-KR" altLang="en-US" sz="900" b="1">
+                <a:solidFill>
+                  <a:schemeClr val="tx1"/>
+                </a:solidFill>
+              </a:endParaRPr>
+            </a:p>
+          </p:txBody>
+        </p:sp>
+        <p:sp>
+          <p:nvSpPr>
+            <p:cNvPr id="46" name="타원 45">
+              <a:extLst>
+                <a:ext uri="{FF2B5EF4-FFF2-40B4-BE49-F238E27FC236}">
+                  <a16:creationId xmlns:a16="http://schemas.microsoft.com/office/drawing/2014/main" id="{3E41A878-11BB-B429-8CF8-F27B27F6B1D3}"/>
+                </a:ext>
+              </a:extLst>
+            </p:cNvPr>
+            <p:cNvSpPr/>
+            <p:nvPr/>
+          </p:nvSpPr>
+          <p:spPr>
+            <a:xfrm>
+              <a:off x="8656319" y="4154179"/>
+              <a:ext cx="152399" cy="128016"/>
+            </a:xfrm>
+            <a:prstGeom prst="ellipse">
+              <a:avLst/>
+            </a:prstGeom>
+            <a:solidFill>
+              <a:srgbClr val="FFFF00"/>
+            </a:solidFill>
+            <a:ln>
+              <a:noFill/>
+            </a:ln>
+          </p:spPr>
+          <p:style>
+            <a:lnRef idx="2">
+              <a:schemeClr val="accent1">
+                <a:shade val="15000"/>
+              </a:schemeClr>
+            </a:lnRef>
+            <a:fillRef idx="1">
+              <a:schemeClr val="accent1"/>
+            </a:fillRef>
+            <a:effectRef idx="0">
+              <a:schemeClr val="accent1"/>
+            </a:effectRef>
+            <a:fontRef idx="minor">
+              <a:schemeClr val="lt1"/>
+            </a:fontRef>
+          </p:style>
+          <p:txBody>
+            <a:bodyPr rtlCol="0" anchor="ctr"/>
+            <a:lstStyle/>
+            <a:p>
+              <a:pPr algn="ctr"/>
+              <a:r>
+                <a:rPr lang="en-US" altLang="ko-KR" sz="900" b="1">
+                  <a:solidFill>
+                    <a:schemeClr val="tx1"/>
+                  </a:solidFill>
+                </a:rPr>
+                <a:t>4</a:t>
+              </a:r>
+              <a:endParaRPr lang="ko-KR" altLang="en-US" sz="900" b="1">
+                <a:solidFill>
+                  <a:schemeClr val="tx1"/>
+                </a:solidFill>
+              </a:endParaRPr>
+            </a:p>
+          </p:txBody>
+        </p:sp>
+        <p:cxnSp>
+          <p:nvCxnSpPr>
+            <p:cNvPr id="47" name="직선 화살표 연결선 46">
+              <a:extLst>
+                <a:ext uri="{FF2B5EF4-FFF2-40B4-BE49-F238E27FC236}">
+                  <a16:creationId xmlns:a16="http://schemas.microsoft.com/office/drawing/2014/main" id="{B6989D30-491C-B5EB-9E0A-19081F54C66E}"/>
+                </a:ext>
+              </a:extLst>
+            </p:cNvPr>
+            <p:cNvCxnSpPr/>
+            <p:nvPr/>
+          </p:nvCxnSpPr>
+          <p:spPr>
+            <a:xfrm>
+              <a:off x="6662928" y="4974091"/>
+              <a:ext cx="204755" cy="0"/>
+            </a:xfrm>
+            <a:prstGeom prst="straightConnector1">
+              <a:avLst/>
+            </a:prstGeom>
+            <a:ln>
+              <a:solidFill>
+                <a:srgbClr val="FFFF00"/>
+              </a:solidFill>
+              <a:tailEnd type="triangle"/>
+            </a:ln>
+          </p:spPr>
+          <p:style>
+            <a:lnRef idx="2">
+              <a:schemeClr val="accent1"/>
+            </a:lnRef>
+            <a:fillRef idx="0">
+              <a:schemeClr val="accent1"/>
+            </a:fillRef>
+            <a:effectRef idx="1">
+              <a:schemeClr val="accent1"/>
+            </a:effectRef>
+            <a:fontRef idx="minor">
+              <a:schemeClr val="tx1"/>
+            </a:fontRef>
+          </p:style>
+        </p:cxnSp>
+        <p:cxnSp>
+          <p:nvCxnSpPr>
+            <p:cNvPr id="48" name="직선 화살표 연결선 47">
+              <a:extLst>
+                <a:ext uri="{FF2B5EF4-FFF2-40B4-BE49-F238E27FC236}">
+                  <a16:creationId xmlns:a16="http://schemas.microsoft.com/office/drawing/2014/main" id="{AAC1CECF-5EE5-8290-3CD4-A2711051DAA2}"/>
+                </a:ext>
+              </a:extLst>
+            </p:cNvPr>
+            <p:cNvCxnSpPr>
+              <a:cxnSpLocks/>
+            </p:cNvCxnSpPr>
+            <p:nvPr/>
+          </p:nvCxnSpPr>
+          <p:spPr>
+            <a:xfrm>
+              <a:off x="6979920" y="4974091"/>
+              <a:ext cx="146304" cy="0"/>
+            </a:xfrm>
+            <a:prstGeom prst="straightConnector1">
+              <a:avLst/>
+            </a:prstGeom>
+            <a:ln>
+              <a:solidFill>
+                <a:srgbClr val="FFFF00"/>
+              </a:solidFill>
+              <a:tailEnd type="triangle"/>
+            </a:ln>
+          </p:spPr>
+          <p:style>
+            <a:lnRef idx="2">
+              <a:schemeClr val="accent1"/>
+            </a:lnRef>
+            <a:fillRef idx="0">
+              <a:schemeClr val="accent1"/>
+            </a:fillRef>
+            <a:effectRef idx="1">
+              <a:schemeClr val="accent1"/>
+            </a:effectRef>
+            <a:fontRef idx="minor">
+              <a:schemeClr val="tx1"/>
+            </a:fontRef>
+          </p:style>
+        </p:cxnSp>
+        <p:cxnSp>
+          <p:nvCxnSpPr>
+            <p:cNvPr id="49" name="직선 화살표 연결선 48">
+              <a:extLst>
+                <a:ext uri="{FF2B5EF4-FFF2-40B4-BE49-F238E27FC236}">
+                  <a16:creationId xmlns:a16="http://schemas.microsoft.com/office/drawing/2014/main" id="{66FD8283-8322-F0D2-3A6B-90DE7FC0A30E}"/>
+                </a:ext>
+              </a:extLst>
+            </p:cNvPr>
+            <p:cNvCxnSpPr>
+              <a:cxnSpLocks/>
+            </p:cNvCxnSpPr>
+            <p:nvPr/>
+          </p:nvCxnSpPr>
+          <p:spPr>
+            <a:xfrm>
+              <a:off x="7269480" y="4974091"/>
+              <a:ext cx="146304" cy="0"/>
+            </a:xfrm>
+            <a:prstGeom prst="straightConnector1">
+              <a:avLst/>
+            </a:prstGeom>
+            <a:ln>
+              <a:solidFill>
+                <a:srgbClr val="FFFF00"/>
+              </a:solidFill>
+              <a:tailEnd type="triangle"/>
+            </a:ln>
+          </p:spPr>
+          <p:style>
+            <a:lnRef idx="2">
+              <a:schemeClr val="accent1"/>
+            </a:lnRef>
+            <a:fillRef idx="0">
+              <a:schemeClr val="accent1"/>
+            </a:fillRef>
+            <a:effectRef idx="1">
+              <a:schemeClr val="accent1"/>
+            </a:effectRef>
+            <a:fontRef idx="minor">
+              <a:schemeClr val="tx1"/>
+            </a:fontRef>
+          </p:style>
+        </p:cxnSp>
+        <p:cxnSp>
+          <p:nvCxnSpPr>
+            <p:cNvPr id="50" name="직선 화살표 연결선 49">
+              <a:extLst>
+                <a:ext uri="{FF2B5EF4-FFF2-40B4-BE49-F238E27FC236}">
+                  <a16:creationId xmlns:a16="http://schemas.microsoft.com/office/drawing/2014/main" id="{9D1DF397-D1C5-8F16-9338-A65A89F0631E}"/>
+                </a:ext>
+              </a:extLst>
+            </p:cNvPr>
+            <p:cNvCxnSpPr>
+              <a:cxnSpLocks/>
+            </p:cNvCxnSpPr>
+            <p:nvPr/>
+          </p:nvCxnSpPr>
+          <p:spPr>
+            <a:xfrm>
+              <a:off x="7536180" y="4974091"/>
+              <a:ext cx="146304" cy="0"/>
+            </a:xfrm>
+            <a:prstGeom prst="straightConnector1">
+              <a:avLst/>
+            </a:prstGeom>
+            <a:ln>
+              <a:solidFill>
+                <a:srgbClr val="FFFF00"/>
+              </a:solidFill>
+              <a:tailEnd type="triangle"/>
+            </a:ln>
+          </p:spPr>
+          <p:style>
+            <a:lnRef idx="2">
+              <a:schemeClr val="accent1"/>
+            </a:lnRef>
+            <a:fillRef idx="0">
+              <a:schemeClr val="accent1"/>
+            </a:fillRef>
+            <a:effectRef idx="1">
+              <a:schemeClr val="accent1"/>
+            </a:effectRef>
+            <a:fontRef idx="minor">
+              <a:schemeClr val="tx1"/>
+            </a:fontRef>
+          </p:style>
+        </p:cxnSp>
+        <p:cxnSp>
+          <p:nvCxnSpPr>
+            <p:cNvPr id="51" name="직선 화살표 연결선 50">
+              <a:extLst>
+                <a:ext uri="{FF2B5EF4-FFF2-40B4-BE49-F238E27FC236}">
+                  <a16:creationId xmlns:a16="http://schemas.microsoft.com/office/drawing/2014/main" id="{333A35C8-335F-0016-C782-47BE9839D6CE}"/>
+                </a:ext>
+              </a:extLst>
+            </p:cNvPr>
+            <p:cNvCxnSpPr>
+              <a:cxnSpLocks/>
+            </p:cNvCxnSpPr>
+            <p:nvPr/>
+          </p:nvCxnSpPr>
+          <p:spPr>
+            <a:xfrm>
+              <a:off x="7787640" y="4974091"/>
+              <a:ext cx="146304" cy="0"/>
+            </a:xfrm>
+            <a:prstGeom prst="straightConnector1">
+              <a:avLst/>
+            </a:prstGeom>
+            <a:ln>
+              <a:solidFill>
+                <a:srgbClr val="FFFF00"/>
+              </a:solidFill>
+              <a:tailEnd type="triangle"/>
+            </a:ln>
+          </p:spPr>
+          <p:style>
+            <a:lnRef idx="2">
+              <a:schemeClr val="accent1"/>
+            </a:lnRef>
+            <a:fillRef idx="0">
+              <a:schemeClr val="accent1"/>
+            </a:fillRef>
+            <a:effectRef idx="1">
+              <a:schemeClr val="accent1"/>
+            </a:effectRef>
+            <a:fontRef idx="minor">
+              <a:schemeClr val="tx1"/>
+            </a:fontRef>
+          </p:style>
+        </p:cxnSp>
+        <p:cxnSp>
+          <p:nvCxnSpPr>
+            <p:cNvPr id="52" name="직선 화살표 연결선 51">
+              <a:extLst>
+                <a:ext uri="{FF2B5EF4-FFF2-40B4-BE49-F238E27FC236}">
+                  <a16:creationId xmlns:a16="http://schemas.microsoft.com/office/drawing/2014/main" id="{C50554E0-7E18-1442-ED00-96ADF91CAF2D}"/>
+                </a:ext>
+              </a:extLst>
+            </p:cNvPr>
+            <p:cNvCxnSpPr>
+              <a:cxnSpLocks/>
+            </p:cNvCxnSpPr>
+            <p:nvPr/>
+          </p:nvCxnSpPr>
+          <p:spPr>
+            <a:xfrm>
+              <a:off x="8054340" y="4974091"/>
+              <a:ext cx="146304" cy="0"/>
+            </a:xfrm>
+            <a:prstGeom prst="straightConnector1">
+              <a:avLst/>
+            </a:prstGeom>
+            <a:ln>
+              <a:solidFill>
+                <a:srgbClr val="FFFF00"/>
+              </a:solidFill>
+              <a:tailEnd type="triangle"/>
+            </a:ln>
+          </p:spPr>
+          <p:style>
+            <a:lnRef idx="2">
+              <a:schemeClr val="accent1"/>
+            </a:lnRef>
+            <a:fillRef idx="0">
+              <a:schemeClr val="accent1"/>
+            </a:fillRef>
+            <a:effectRef idx="1">
+              <a:schemeClr val="accent1"/>
+            </a:effectRef>
+            <a:fontRef idx="minor">
+              <a:schemeClr val="tx1"/>
+            </a:fontRef>
+          </p:style>
+        </p:cxnSp>
+        <p:grpSp>
+          <p:nvGrpSpPr>
+            <p:cNvPr id="53" name="그룹 52">
+              <a:extLst>
+                <a:ext uri="{FF2B5EF4-FFF2-40B4-BE49-F238E27FC236}">
+                  <a16:creationId xmlns:a16="http://schemas.microsoft.com/office/drawing/2014/main" id="{9CE9B919-6D45-2301-E534-CA06D69DB35C}"/>
+                </a:ext>
+              </a:extLst>
+            </p:cNvPr>
+            <p:cNvGrpSpPr/>
+            <p:nvPr/>
+          </p:nvGrpSpPr>
+          <p:grpSpPr>
+            <a:xfrm>
+              <a:off x="6531625" y="3972560"/>
+              <a:ext cx="2126727" cy="943617"/>
+              <a:chOff x="6531625" y="3972560"/>
+              <a:chExt cx="2126727" cy="1285240"/>
+            </a:xfrm>
+          </p:grpSpPr>
+          <p:cxnSp>
+            <p:nvCxnSpPr>
+              <p:cNvPr id="55" name="직선 연결선 54">
+                <a:extLst>
+                  <a:ext uri="{FF2B5EF4-FFF2-40B4-BE49-F238E27FC236}">
+                    <a16:creationId xmlns:a16="http://schemas.microsoft.com/office/drawing/2014/main" id="{E9523BB7-FD26-A647-B827-BEA8E3CA0190}"/>
+                  </a:ext>
+                </a:extLst>
+              </p:cNvPr>
+              <p:cNvCxnSpPr/>
+              <p:nvPr/>
+            </p:nvCxnSpPr>
+            <p:spPr>
+              <a:xfrm>
+                <a:off x="6790705" y="3972560"/>
+                <a:ext cx="0" cy="1285240"/>
+              </a:xfrm>
+              <a:prstGeom prst="line">
+                <a:avLst/>
+              </a:prstGeom>
+              <a:ln w="9525">
+                <a:solidFill>
+                  <a:srgbClr val="FFFF00"/>
+                </a:solidFill>
+                <a:prstDash val="sysDot"/>
+              </a:ln>
+            </p:spPr>
+            <p:style>
+              <a:lnRef idx="2">
+                <a:schemeClr val="accent1"/>
+              </a:lnRef>
+              <a:fillRef idx="0">
+                <a:schemeClr val="accent1"/>
+              </a:fillRef>
+              <a:effectRef idx="1">
+                <a:schemeClr val="accent1"/>
+              </a:effectRef>
+              <a:fontRef idx="minor">
+                <a:schemeClr val="tx1"/>
+              </a:fontRef>
+            </p:style>
+          </p:cxnSp>
+          <p:cxnSp>
+            <p:nvCxnSpPr>
+              <p:cNvPr id="56" name="직선 연결선 55">
+                <a:extLst>
+                  <a:ext uri="{FF2B5EF4-FFF2-40B4-BE49-F238E27FC236}">
+                    <a16:creationId xmlns:a16="http://schemas.microsoft.com/office/drawing/2014/main" id="{80390313-10D3-805E-DB96-8B7D923B328C}"/>
+                  </a:ext>
+                </a:extLst>
+              </p:cNvPr>
+              <p:cNvCxnSpPr>
+                <a:cxnSpLocks/>
+              </p:cNvCxnSpPr>
+              <p:nvPr/>
+            </p:nvCxnSpPr>
+            <p:spPr>
+              <a:xfrm>
+                <a:off x="6531625" y="3972560"/>
+                <a:ext cx="0" cy="1285240"/>
+              </a:xfrm>
+              <a:prstGeom prst="line">
+                <a:avLst/>
+              </a:prstGeom>
+              <a:ln w="9525">
+                <a:solidFill>
+                  <a:srgbClr val="FFFF00"/>
+                </a:solidFill>
+                <a:prstDash val="sysDot"/>
+              </a:ln>
+            </p:spPr>
+            <p:style>
+              <a:lnRef idx="2">
+                <a:schemeClr val="accent1"/>
+              </a:lnRef>
+              <a:fillRef idx="0">
+                <a:schemeClr val="accent1"/>
+              </a:fillRef>
+              <a:effectRef idx="1">
+                <a:schemeClr val="accent1"/>
+              </a:effectRef>
+              <a:fontRef idx="minor">
+                <a:schemeClr val="tx1"/>
+              </a:fontRef>
+            </p:style>
+          </p:cxnSp>
+          <p:cxnSp>
+            <p:nvCxnSpPr>
+              <p:cNvPr id="57" name="직선 연결선 56">
+                <a:extLst>
+                  <a:ext uri="{FF2B5EF4-FFF2-40B4-BE49-F238E27FC236}">
+                    <a16:creationId xmlns:a16="http://schemas.microsoft.com/office/drawing/2014/main" id="{CC90D9A8-48B8-5BD7-0557-DD55CC63D975}"/>
+                  </a:ext>
+                </a:extLst>
+              </p:cNvPr>
+              <p:cNvCxnSpPr/>
+              <p:nvPr/>
+            </p:nvCxnSpPr>
+            <p:spPr>
+              <a:xfrm>
+                <a:off x="7337552" y="3972560"/>
+                <a:ext cx="0" cy="1285240"/>
+              </a:xfrm>
+              <a:prstGeom prst="line">
+                <a:avLst/>
+              </a:prstGeom>
+              <a:ln w="9525">
+                <a:solidFill>
+                  <a:srgbClr val="FFFF00"/>
+                </a:solidFill>
+                <a:prstDash val="sysDot"/>
+              </a:ln>
+            </p:spPr>
+            <p:style>
+              <a:lnRef idx="2">
+                <a:schemeClr val="accent1"/>
+              </a:lnRef>
+              <a:fillRef idx="0">
+                <a:schemeClr val="accent1"/>
+              </a:fillRef>
+              <a:effectRef idx="1">
+                <a:schemeClr val="accent1"/>
+              </a:effectRef>
+              <a:fontRef idx="minor">
+                <a:schemeClr val="tx1"/>
+              </a:fontRef>
+            </p:style>
+          </p:cxnSp>
+          <p:cxnSp>
+            <p:nvCxnSpPr>
+              <p:cNvPr id="58" name="직선 연결선 57">
+                <a:extLst>
+                  <a:ext uri="{FF2B5EF4-FFF2-40B4-BE49-F238E27FC236}">
+                    <a16:creationId xmlns:a16="http://schemas.microsoft.com/office/drawing/2014/main" id="{D275DE85-02A6-8480-5C0A-464036CFD10E}"/>
+                  </a:ext>
+                </a:extLst>
+              </p:cNvPr>
+              <p:cNvCxnSpPr/>
+              <p:nvPr/>
+            </p:nvCxnSpPr>
+            <p:spPr>
+              <a:xfrm>
+                <a:off x="7073392" y="3972560"/>
+                <a:ext cx="0" cy="1285240"/>
+              </a:xfrm>
+              <a:prstGeom prst="line">
+                <a:avLst/>
+              </a:prstGeom>
+              <a:ln w="9525">
+                <a:solidFill>
+                  <a:srgbClr val="FFFF00"/>
+                </a:solidFill>
+                <a:prstDash val="sysDot"/>
+              </a:ln>
+            </p:spPr>
+            <p:style>
+              <a:lnRef idx="2">
+                <a:schemeClr val="accent1"/>
+              </a:lnRef>
+              <a:fillRef idx="0">
+                <a:schemeClr val="accent1"/>
+              </a:fillRef>
+              <a:effectRef idx="1">
+                <a:schemeClr val="accent1"/>
+              </a:effectRef>
+              <a:fontRef idx="minor">
+                <a:schemeClr val="tx1"/>
+              </a:fontRef>
+            </p:style>
+          </p:cxnSp>
+          <p:cxnSp>
+            <p:nvCxnSpPr>
+              <p:cNvPr id="59" name="직선 연결선 58">
+                <a:extLst>
+                  <a:ext uri="{FF2B5EF4-FFF2-40B4-BE49-F238E27FC236}">
+                    <a16:creationId xmlns:a16="http://schemas.microsoft.com/office/drawing/2014/main" id="{C4EB94DD-0218-E8FB-4311-AA09C91904CF}"/>
+                  </a:ext>
+                </a:extLst>
+              </p:cNvPr>
+              <p:cNvCxnSpPr/>
+              <p:nvPr/>
+            </p:nvCxnSpPr>
+            <p:spPr>
+              <a:xfrm>
+                <a:off x="7860792" y="3972560"/>
+                <a:ext cx="0" cy="1285240"/>
+              </a:xfrm>
+              <a:prstGeom prst="line">
+                <a:avLst/>
+              </a:prstGeom>
+              <a:ln w="9525">
+                <a:solidFill>
+                  <a:srgbClr val="FFFF00"/>
+                </a:solidFill>
+                <a:prstDash val="sysDot"/>
+              </a:ln>
+            </p:spPr>
+            <p:style>
+              <a:lnRef idx="2">
+                <a:schemeClr val="accent1"/>
+              </a:lnRef>
+              <a:fillRef idx="0">
+                <a:schemeClr val="accent1"/>
+              </a:fillRef>
+              <a:effectRef idx="1">
+                <a:schemeClr val="accent1"/>
+              </a:effectRef>
+              <a:fontRef idx="minor">
+                <a:schemeClr val="tx1"/>
+              </a:fontRef>
+            </p:style>
+          </p:cxnSp>
+          <p:cxnSp>
+            <p:nvCxnSpPr>
+              <p:cNvPr id="60" name="직선 연결선 59">
+                <a:extLst>
+                  <a:ext uri="{FF2B5EF4-FFF2-40B4-BE49-F238E27FC236}">
+                    <a16:creationId xmlns:a16="http://schemas.microsoft.com/office/drawing/2014/main" id="{C5915F6F-D721-14EF-64E9-E86B68CDC185}"/>
+                  </a:ext>
+                </a:extLst>
+              </p:cNvPr>
+              <p:cNvCxnSpPr/>
+              <p:nvPr/>
+            </p:nvCxnSpPr>
+            <p:spPr>
+              <a:xfrm>
+                <a:off x="7601712" y="3972560"/>
+                <a:ext cx="0" cy="1285240"/>
+              </a:xfrm>
+              <a:prstGeom prst="line">
+                <a:avLst/>
+              </a:prstGeom>
+              <a:ln w="9525">
+                <a:solidFill>
+                  <a:srgbClr val="FFFF00"/>
+                </a:solidFill>
+                <a:prstDash val="sysDot"/>
+              </a:ln>
+            </p:spPr>
+            <p:style>
+              <a:lnRef idx="2">
+                <a:schemeClr val="accent1"/>
+              </a:lnRef>
+              <a:fillRef idx="0">
+                <a:schemeClr val="accent1"/>
+              </a:fillRef>
+              <a:effectRef idx="1">
+                <a:schemeClr val="accent1"/>
+              </a:effectRef>
+              <a:fontRef idx="minor">
+                <a:schemeClr val="tx1"/>
+              </a:fontRef>
+            </p:style>
+          </p:cxnSp>
+          <p:cxnSp>
+            <p:nvCxnSpPr>
+              <p:cNvPr id="61" name="직선 연결선 60">
+                <a:extLst>
+                  <a:ext uri="{FF2B5EF4-FFF2-40B4-BE49-F238E27FC236}">
+                    <a16:creationId xmlns:a16="http://schemas.microsoft.com/office/drawing/2014/main" id="{07662AAC-8BE5-1094-B673-0425C62419D3}"/>
+                  </a:ext>
+                </a:extLst>
+              </p:cNvPr>
+              <p:cNvCxnSpPr/>
+              <p:nvPr/>
+            </p:nvCxnSpPr>
+            <p:spPr>
+              <a:xfrm>
+                <a:off x="8378952" y="3972560"/>
+                <a:ext cx="0" cy="1285240"/>
+              </a:xfrm>
+              <a:prstGeom prst="line">
+                <a:avLst/>
+              </a:prstGeom>
+              <a:ln w="9525">
+                <a:solidFill>
+                  <a:srgbClr val="FFFF00"/>
+                </a:solidFill>
+                <a:prstDash val="sysDot"/>
+              </a:ln>
+            </p:spPr>
+            <p:style>
+              <a:lnRef idx="2">
+                <a:schemeClr val="accent1"/>
+              </a:lnRef>
+              <a:fillRef idx="0">
+                <a:schemeClr val="accent1"/>
+              </a:fillRef>
+              <a:effectRef idx="1">
+                <a:schemeClr val="accent1"/>
+              </a:effectRef>
+              <a:fontRef idx="minor">
+                <a:schemeClr val="tx1"/>
+              </a:fontRef>
+            </p:style>
+          </p:cxnSp>
+          <p:cxnSp>
+            <p:nvCxnSpPr>
+              <p:cNvPr id="62" name="직선 연결선 61">
+                <a:extLst>
+                  <a:ext uri="{FF2B5EF4-FFF2-40B4-BE49-F238E27FC236}">
+                    <a16:creationId xmlns:a16="http://schemas.microsoft.com/office/drawing/2014/main" id="{B056F92C-593C-9BD6-1162-2B1ED1AFE136}"/>
+                  </a:ext>
+                </a:extLst>
+              </p:cNvPr>
+              <p:cNvCxnSpPr/>
+              <p:nvPr/>
+            </p:nvCxnSpPr>
+            <p:spPr>
+              <a:xfrm>
+                <a:off x="8119872" y="3972560"/>
+                <a:ext cx="0" cy="1285240"/>
+              </a:xfrm>
+              <a:prstGeom prst="line">
+                <a:avLst/>
+              </a:prstGeom>
+              <a:ln w="9525">
+                <a:solidFill>
+                  <a:srgbClr val="FFFF00"/>
+                </a:solidFill>
+                <a:prstDash val="sysDot"/>
+              </a:ln>
+            </p:spPr>
+            <p:style>
+              <a:lnRef idx="2">
+                <a:schemeClr val="accent1"/>
+              </a:lnRef>
+              <a:fillRef idx="0">
+                <a:schemeClr val="accent1"/>
+              </a:fillRef>
+              <a:effectRef idx="1">
+                <a:schemeClr val="accent1"/>
+              </a:effectRef>
+              <a:fontRef idx="minor">
+                <a:schemeClr val="tx1"/>
+              </a:fontRef>
+            </p:style>
+          </p:cxnSp>
+          <p:cxnSp>
+            <p:nvCxnSpPr>
+              <p:cNvPr id="63" name="직선 연결선 62">
+                <a:extLst>
+                  <a:ext uri="{FF2B5EF4-FFF2-40B4-BE49-F238E27FC236}">
+                    <a16:creationId xmlns:a16="http://schemas.microsoft.com/office/drawing/2014/main" id="{AB623D8F-BB65-D9B6-2325-24E16C530C77}"/>
+                  </a:ext>
+                </a:extLst>
+              </p:cNvPr>
+              <p:cNvCxnSpPr/>
+              <p:nvPr/>
+            </p:nvCxnSpPr>
+            <p:spPr>
+              <a:xfrm>
+                <a:off x="8658352" y="3972560"/>
+                <a:ext cx="0" cy="1285240"/>
+              </a:xfrm>
+              <a:prstGeom prst="line">
+                <a:avLst/>
+              </a:prstGeom>
+              <a:ln w="9525">
+                <a:solidFill>
+                  <a:srgbClr val="FFFF00"/>
+                </a:solidFill>
+                <a:prstDash val="sysDot"/>
+              </a:ln>
+            </p:spPr>
+            <p:style>
+              <a:lnRef idx="2">
+                <a:schemeClr val="accent1"/>
+              </a:lnRef>
+              <a:fillRef idx="0">
+                <a:schemeClr val="accent1"/>
+              </a:fillRef>
+              <a:effectRef idx="1">
+                <a:schemeClr val="accent1"/>
+              </a:effectRef>
+              <a:fontRef idx="minor">
+                <a:schemeClr val="tx1"/>
+              </a:fontRef>
+            </p:style>
+          </p:cxnSp>
+        </p:grpSp>
+        <p:sp>
+          <p:nvSpPr>
+            <p:cNvPr id="54" name="직사각형 53">
+              <a:extLst>
+                <a:ext uri="{FF2B5EF4-FFF2-40B4-BE49-F238E27FC236}">
+                  <a16:creationId xmlns:a16="http://schemas.microsoft.com/office/drawing/2014/main" id="{9F41F59D-10D0-DEFC-62B4-6176D886D3C5}"/>
+                </a:ext>
+              </a:extLst>
+            </p:cNvPr>
+            <p:cNvSpPr/>
+            <p:nvPr/>
+          </p:nvSpPr>
+          <p:spPr>
+            <a:xfrm>
+              <a:off x="6314440" y="4916177"/>
+              <a:ext cx="333009" cy="128012"/>
+            </a:xfrm>
+            <a:prstGeom prst="rect">
+              <a:avLst/>
+            </a:prstGeom>
+            <a:noFill/>
+            <a:ln>
+              <a:solidFill>
+                <a:srgbClr val="FFFF00"/>
+              </a:solidFill>
+            </a:ln>
+          </p:spPr>
+          <p:style>
+            <a:lnRef idx="2">
+              <a:schemeClr val="accent1">
+                <a:shade val="15000"/>
+              </a:schemeClr>
+            </a:lnRef>
+            <a:fillRef idx="1">
+              <a:schemeClr val="accent1"/>
+            </a:fillRef>
+            <a:effectRef idx="0">
+              <a:schemeClr val="accent1"/>
+            </a:effectRef>
+            <a:fontRef idx="minor">
+              <a:schemeClr val="lt1"/>
+            </a:fontRef>
+          </p:style>
+          <p:txBody>
+            <a:bodyPr rtlCol="0" anchor="ctr"/>
+            <a:lstStyle/>
+            <a:p>
+              <a:pPr algn="ctr"/>
+              <a:endParaRPr lang="ko-KR" altLang="en-US" sz="1400"/>
+            </a:p>
+          </p:txBody>
+        </p:sp>
+      </p:grpSp>
+      <p:pic>
+        <p:nvPicPr>
+          <p:cNvPr id="14" name="그림 13">
+            <a:extLst>
+              <a:ext uri="{FF2B5EF4-FFF2-40B4-BE49-F238E27FC236}">
+                <a16:creationId xmlns:a16="http://schemas.microsoft.com/office/drawing/2014/main" id="{D28921CF-001C-02E3-437D-D4D5AEB91331}"/>
+              </a:ext>
+            </a:extLst>
+          </p:cNvPr>
+          <p:cNvPicPr>
+            <a:picLocks noChangeAspect="1"/>
+          </p:cNvPicPr>
+          <p:nvPr/>
+        </p:nvPicPr>
+        <p:blipFill>
+          <a:blip r:embed="rId3"/>
+          <a:stretch>
+            <a:fillRect/>
+          </a:stretch>
+        </p:blipFill>
+        <p:spPr>
+          <a:xfrm>
+            <a:off x="4674205" y="2573099"/>
+            <a:ext cx="6541705" cy="2856286"/>
+          </a:xfrm>
+          <a:prstGeom prst="rect">
+            <a:avLst/>
+          </a:prstGeom>
+        </p:spPr>
+      </p:pic>
+      <p:sp>
+        <p:nvSpPr>
+          <p:cNvPr id="72" name="직사각형 71">
+            <a:extLst>
+              <a:ext uri="{FF2B5EF4-FFF2-40B4-BE49-F238E27FC236}">
+                <a16:creationId xmlns:a16="http://schemas.microsoft.com/office/drawing/2014/main" id="{0A25885E-5EF2-C7D3-30A0-46CF189DB9D1}"/>
+              </a:ext>
+            </a:extLst>
+          </p:cNvPr>
+          <p:cNvSpPr/>
+          <p:nvPr/>
+        </p:nvSpPr>
+        <p:spPr>
+          <a:xfrm>
+            <a:off x="3712803" y="2627217"/>
+            <a:ext cx="564835" cy="1488012"/>
+          </a:xfrm>
+          <a:prstGeom prst="rect">
+            <a:avLst/>
+          </a:prstGeom>
+          <a:noFill/>
+          <a:ln>
+            <a:solidFill>
+              <a:srgbClr val="FF0000"/>
+            </a:solidFill>
+            <a:prstDash val="dash"/>
+          </a:ln>
+        </p:spPr>
+        <p:style>
+          <a:lnRef idx="2">
+            <a:schemeClr val="accent1">
+              <a:shade val="15000"/>
+            </a:schemeClr>
+          </a:lnRef>
+          <a:fillRef idx="1">
+            <a:schemeClr val="accent1"/>
+          </a:fillRef>
+          <a:effectRef idx="0">
+            <a:schemeClr val="accent1"/>
+          </a:effectRef>
+          <a:fontRef idx="minor">
+            <a:schemeClr val="lt1"/>
+          </a:fontRef>
+        </p:style>
+        <p:txBody>
+          <a:bodyPr rtlCol="0" anchor="ctr"/>
+          <a:lstStyle/>
+          <a:p>
+            <a:pPr algn="ctr"/>
+            <a:endParaRPr lang="ko-KR" altLang="en-US"/>
+          </a:p>
+        </p:txBody>
+      </p:sp>
+      <p:cxnSp>
+        <p:nvCxnSpPr>
+          <p:cNvPr id="74" name="직선 연결선 73">
+            <a:extLst>
+              <a:ext uri="{FF2B5EF4-FFF2-40B4-BE49-F238E27FC236}">
+                <a16:creationId xmlns:a16="http://schemas.microsoft.com/office/drawing/2014/main" id="{331ACB52-71C3-F973-6735-456F9FC24FEA}"/>
+              </a:ext>
+            </a:extLst>
+          </p:cNvPr>
+          <p:cNvCxnSpPr>
+            <a:cxnSpLocks/>
+          </p:cNvCxnSpPr>
+          <p:nvPr/>
+        </p:nvCxnSpPr>
+        <p:spPr>
+          <a:xfrm>
+            <a:off x="8004630" y="3055257"/>
+            <a:ext cx="0" cy="2510972"/>
+          </a:xfrm>
+          <a:prstGeom prst="line">
+            <a:avLst/>
+          </a:prstGeom>
+          <a:ln w="9525">
+            <a:solidFill>
+              <a:srgbClr val="FF0000"/>
+            </a:solidFill>
+            <a:prstDash val="dash"/>
+          </a:ln>
+        </p:spPr>
+        <p:style>
+          <a:lnRef idx="2">
+            <a:schemeClr val="accent1"/>
+          </a:lnRef>
+          <a:fillRef idx="0">
+            <a:schemeClr val="accent1"/>
+          </a:fillRef>
+          <a:effectRef idx="1">
+            <a:schemeClr val="accent1"/>
+          </a:effectRef>
+          <a:fontRef idx="minor">
+            <a:schemeClr val="tx1"/>
+          </a:fontRef>
+        </p:style>
+      </p:cxnSp>
+      <p:cxnSp>
+        <p:nvCxnSpPr>
+          <p:cNvPr id="78" name="직선 화살표 연결선 77">
+            <a:extLst>
+              <a:ext uri="{FF2B5EF4-FFF2-40B4-BE49-F238E27FC236}">
+                <a16:creationId xmlns:a16="http://schemas.microsoft.com/office/drawing/2014/main" id="{F5D7E2F7-19FA-60A7-CCDF-EAB9427421A0}"/>
+              </a:ext>
+            </a:extLst>
+          </p:cNvPr>
+          <p:cNvCxnSpPr/>
+          <p:nvPr/>
+        </p:nvCxnSpPr>
+        <p:spPr>
+          <a:xfrm flipV="1">
+            <a:off x="8004630" y="2859983"/>
+            <a:ext cx="0" cy="231559"/>
+          </a:xfrm>
+          <a:prstGeom prst="straightConnector1">
+            <a:avLst/>
+          </a:prstGeom>
+          <a:ln>
+            <a:solidFill>
+              <a:srgbClr val="FF0000"/>
+            </a:solidFill>
+            <a:tailEnd type="triangle"/>
+          </a:ln>
+        </p:spPr>
+        <p:style>
+          <a:lnRef idx="2">
+            <a:schemeClr val="accent1"/>
+          </a:lnRef>
+          <a:fillRef idx="0">
+            <a:schemeClr val="accent1"/>
+          </a:fillRef>
+          <a:effectRef idx="1">
+            <a:schemeClr val="accent1"/>
+          </a:effectRef>
+          <a:fontRef idx="minor">
+            <a:schemeClr val="tx1"/>
+          </a:fontRef>
+        </p:style>
+      </p:cxnSp>
+      <p:cxnSp>
+        <p:nvCxnSpPr>
+          <p:cNvPr id="79" name="직선 연결선 78">
+            <a:extLst>
+              <a:ext uri="{FF2B5EF4-FFF2-40B4-BE49-F238E27FC236}">
+                <a16:creationId xmlns:a16="http://schemas.microsoft.com/office/drawing/2014/main" id="{5C9252D5-13BA-8073-8493-7C8BB7EB7E7F}"/>
+              </a:ext>
+            </a:extLst>
+          </p:cNvPr>
+          <p:cNvCxnSpPr>
+            <a:cxnSpLocks/>
+          </p:cNvCxnSpPr>
+          <p:nvPr/>
+        </p:nvCxnSpPr>
+        <p:spPr>
+          <a:xfrm>
+            <a:off x="8171544" y="3055257"/>
+            <a:ext cx="0" cy="2510972"/>
+          </a:xfrm>
+          <a:prstGeom prst="line">
+            <a:avLst/>
+          </a:prstGeom>
+          <a:ln w="9525">
+            <a:solidFill>
+              <a:srgbClr val="FF0000"/>
+            </a:solidFill>
+            <a:prstDash val="dash"/>
+          </a:ln>
+        </p:spPr>
+        <p:style>
+          <a:lnRef idx="2">
+            <a:schemeClr val="accent1"/>
+          </a:lnRef>
+          <a:fillRef idx="0">
+            <a:schemeClr val="accent1"/>
+          </a:fillRef>
+          <a:effectRef idx="1">
+            <a:schemeClr val="accent1"/>
+          </a:effectRef>
+          <a:fontRef idx="minor">
+            <a:schemeClr val="tx1"/>
+          </a:fontRef>
+        </p:style>
+      </p:cxnSp>
+      <p:sp>
+        <p:nvSpPr>
+          <p:cNvPr id="81" name="직사각형 80">
+            <a:extLst>
+              <a:ext uri="{FF2B5EF4-FFF2-40B4-BE49-F238E27FC236}">
+                <a16:creationId xmlns:a16="http://schemas.microsoft.com/office/drawing/2014/main" id="{08BEB857-35BF-84E7-1FE4-9B23C9BB8106}"/>
+              </a:ext>
+            </a:extLst>
+          </p:cNvPr>
+          <p:cNvSpPr/>
+          <p:nvPr/>
+        </p:nvSpPr>
+        <p:spPr>
+          <a:xfrm>
+            <a:off x="4695130" y="2571517"/>
+            <a:ext cx="6520779" cy="2856283"/>
+          </a:xfrm>
+          <a:prstGeom prst="rect">
+            <a:avLst/>
+          </a:prstGeom>
+          <a:noFill/>
+          <a:ln>
+            <a:solidFill>
+              <a:srgbClr val="FF0000"/>
+            </a:solidFill>
+            <a:prstDash val="dash"/>
+          </a:ln>
+        </p:spPr>
+        <p:style>
+          <a:lnRef idx="2">
+            <a:schemeClr val="accent1">
+              <a:shade val="15000"/>
+            </a:schemeClr>
+          </a:lnRef>
+          <a:fillRef idx="1">
+            <a:schemeClr val="accent1"/>
+          </a:fillRef>
+          <a:effectRef idx="0">
+            <a:schemeClr val="accent1"/>
+          </a:effectRef>
+          <a:fontRef idx="minor">
+            <a:schemeClr val="lt1"/>
+          </a:fontRef>
+        </p:style>
+        <p:txBody>
+          <a:bodyPr rtlCol="0" anchor="ctr"/>
+          <a:lstStyle/>
+          <a:p>
+            <a:pPr algn="ctr"/>
             <a:endParaRPr lang="ko-KR" altLang="en-US"/>
           </a:p>
         </p:txBody>
@@ -7831,7 +12152,7 @@
     </p:spTree>
     <p:extLst>
       <p:ext uri="{BB962C8B-B14F-4D97-AF65-F5344CB8AC3E}">
-        <p14:creationId xmlns:p14="http://schemas.microsoft.com/office/powerpoint/2010/main" val="1488245124"/>
+        <p14:creationId xmlns:p14="http://schemas.microsoft.com/office/powerpoint/2010/main" val="3596761061"/>
       </p:ext>
     </p:extLst>
   </p:cSld>
@@ -8154,4 +12475,319 @@
     </a:ext>
   </a:extLst>
 </a:theme>
+</file>
+
+<file path=ppt/theme/theme2.xml><?xml version="1.0" encoding="utf-8"?>
+<a:theme xmlns:a="http://schemas.openxmlformats.org/drawingml/2006/main" name="Office 테마">
+  <a:themeElements>
+    <a:clrScheme name="Office">
+      <a:dk1>
+        <a:sysClr val="windowText" lastClr="000000"/>
+      </a:dk1>
+      <a:lt1>
+        <a:sysClr val="window" lastClr="FFFFFF"/>
+      </a:lt1>
+      <a:dk2>
+        <a:srgbClr val="0E2841"/>
+      </a:dk2>
+      <a:lt2>
+        <a:srgbClr val="E8E8E8"/>
+      </a:lt2>
+      <a:accent1>
+        <a:srgbClr val="156082"/>
+      </a:accent1>
+      <a:accent2>
+        <a:srgbClr val="E97132"/>
+      </a:accent2>
+      <a:accent3>
+        <a:srgbClr val="196B24"/>
+      </a:accent3>
+      <a:accent4>
+        <a:srgbClr val="0F9ED5"/>
+      </a:accent4>
+      <a:accent5>
+        <a:srgbClr val="A02B93"/>
+      </a:accent5>
+      <a:accent6>
+        <a:srgbClr val="4EA72E"/>
+      </a:accent6>
+      <a:hlink>
+        <a:srgbClr val="467886"/>
+      </a:hlink>
+      <a:folHlink>
+        <a:srgbClr val="96607D"/>
+      </a:folHlink>
+    </a:clrScheme>
+    <a:fontScheme name="Office">
+      <a:majorFont>
+        <a:latin typeface="맑은 고딕" panose="02110004020202020204"/>
+        <a:ea typeface=""/>
+        <a:cs typeface=""/>
+        <a:font script="Jpan" typeface="游ゴシック Light"/>
+        <a:font script="Hang" typeface="맑은 고딕"/>
+        <a:font script="Hans" typeface="等线 Light"/>
+        <a:font script="Hant" typeface="新細明體"/>
+        <a:font script="Arab" typeface="Times New Roman"/>
+        <a:font script="Hebr" typeface="Times New Roman"/>
+        <a:font script="Thai" typeface="Angsana New"/>
+        <a:font script="Ethi" typeface="Nyala"/>
+        <a:font script="Beng" typeface="Vrinda"/>
+        <a:font script="Gujr" typeface="Shruti"/>
+        <a:font script="Khmr" typeface="MoolBoran"/>
+        <a:font script="Knda" typeface="Tunga"/>
+        <a:font script="Guru" typeface="Raavi"/>
+        <a:font script="Cans" typeface="Euphemia"/>
+        <a:font script="Cher" typeface="Plantagenet Cherokee"/>
+        <a:font script="Yiii" typeface="Microsoft Yi Baiti"/>
+        <a:font script="Tibt" typeface="Microsoft Himalaya"/>
+        <a:font script="Thaa" typeface="MV Boli"/>
+        <a:font script="Deva" typeface="Mangal"/>
+        <a:font script="Telu" typeface="Gautami"/>
+        <a:font script="Taml" typeface="Latha"/>
+        <a:font script="Syrc" typeface="Estrangelo Edessa"/>
+        <a:font script="Orya" typeface="Kalinga"/>
+        <a:font script="Mlym" typeface="Kartika"/>
+        <a:font script="Laoo" typeface="DokChampa"/>
+        <a:font script="Sinh" typeface="Iskoola Pota"/>
+        <a:font script="Mong" typeface="Mongolian Baiti"/>
+        <a:font script="Viet" typeface="Times New Roman"/>
+        <a:font script="Uigh" typeface="Microsoft Uighur"/>
+        <a:font script="Geor" typeface="Sylfaen"/>
+        <a:font script="Armn" typeface="Arial"/>
+        <a:font script="Bugi" typeface="Leelawadee UI"/>
+        <a:font script="Bopo" typeface="Microsoft JhengHei"/>
+        <a:font script="Java" typeface="Javanese Text"/>
+        <a:font script="Lisu" typeface="Segoe UI"/>
+        <a:font script="Mymr" typeface="Myanmar Text"/>
+        <a:font script="Nkoo" typeface="Ebrima"/>
+        <a:font script="Olck" typeface="Nirmala UI"/>
+        <a:font script="Osma" typeface="Ebrima"/>
+        <a:font script="Phag" typeface="Phagspa"/>
+        <a:font script="Syrn" typeface="Estrangelo Edessa"/>
+        <a:font script="Syrj" typeface="Estrangelo Edessa"/>
+        <a:font script="Syre" typeface="Estrangelo Edessa"/>
+        <a:font script="Sora" typeface="Nirmala UI"/>
+        <a:font script="Tale" typeface="Microsoft Tai Le"/>
+        <a:font script="Talu" typeface="Microsoft New Tai Lue"/>
+        <a:font script="Tfng" typeface="Ebrima"/>
+      </a:majorFont>
+      <a:minorFont>
+        <a:latin typeface="맑은 고딕" panose="02110004020202020204"/>
+        <a:ea typeface=""/>
+        <a:cs typeface=""/>
+        <a:font script="Jpan" typeface="游ゴシック"/>
+        <a:font script="Hang" typeface="맑은 고딕"/>
+        <a:font script="Hans" typeface="等线"/>
+        <a:font script="Hant" typeface="新細明體"/>
+        <a:font script="Arab" typeface="Arial"/>
+        <a:font script="Hebr" typeface="Arial"/>
+        <a:font script="Thai" typeface="Cordia New"/>
+        <a:font script="Ethi" typeface="Nyala"/>
+        <a:font script="Beng" typeface="Vrinda"/>
+        <a:font script="Gujr" typeface="Shruti"/>
+        <a:font script="Khmr" typeface="DaunPenh"/>
+        <a:font script="Knda" typeface="Tunga"/>
+        <a:font script="Guru" typeface="Raavi"/>
+        <a:font script="Cans" typeface="Euphemia"/>
+        <a:font script="Cher" typeface="Plantagenet Cherokee"/>
+        <a:font script="Yiii" typeface="Microsoft Yi Baiti"/>
+        <a:font script="Tibt" typeface="Microsoft Himalaya"/>
+        <a:font script="Thaa" typeface="MV Boli"/>
+        <a:font script="Deva" typeface="Mangal"/>
+        <a:font script="Telu" typeface="Gautami"/>
+        <a:font script="Taml" typeface="Latha"/>
+        <a:font script="Syrc" typeface="Estrangelo Edessa"/>
+        <a:font script="Orya" typeface="Kalinga"/>
+        <a:font script="Mlym" typeface="Kartika"/>
+        <a:font script="Laoo" typeface="DokChampa"/>
+        <a:font script="Sinh" typeface="Iskoola Pota"/>
+        <a:font script="Mong" typeface="Mongolian Baiti"/>
+        <a:font script="Viet" typeface="Arial"/>
+        <a:font script="Uigh" typeface="Microsoft Uighur"/>
+        <a:font script="Geor" typeface="Sylfaen"/>
+        <a:font script="Armn" typeface="Arial"/>
+        <a:font script="Bugi" typeface="Leelawadee UI"/>
+        <a:font script="Bopo" typeface="Microsoft JhengHei"/>
+        <a:font script="Java" typeface="Javanese Text"/>
+        <a:font script="Lisu" typeface="Segoe UI"/>
+        <a:font script="Mymr" typeface="Myanmar Text"/>
+        <a:font script="Nkoo" typeface="Ebrima"/>
+        <a:font script="Olck" typeface="Nirmala UI"/>
+        <a:font script="Osma" typeface="Ebrima"/>
+        <a:font script="Phag" typeface="Phagspa"/>
+        <a:font script="Syrn" typeface="Estrangelo Edessa"/>
+        <a:font script="Syrj" typeface="Estrangelo Edessa"/>
+        <a:font script="Syre" typeface="Estrangelo Edessa"/>
+        <a:font script="Sora" typeface="Nirmala UI"/>
+        <a:font script="Tale" typeface="Microsoft Tai Le"/>
+        <a:font script="Talu" typeface="Microsoft New Tai Lue"/>
+        <a:font script="Tfng" typeface="Ebrima"/>
+      </a:minorFont>
+    </a:fontScheme>
+    <a:fmtScheme name="Office">
+      <a:fillStyleLst>
+        <a:solidFill>
+          <a:schemeClr val="phClr"/>
+        </a:solidFill>
+        <a:gradFill rotWithShape="1">
+          <a:gsLst>
+            <a:gs pos="0">
+              <a:schemeClr val="phClr">
+                <a:lumMod val="110000"/>
+                <a:satMod val="105000"/>
+                <a:tint val="67000"/>
+              </a:schemeClr>
+            </a:gs>
+            <a:gs pos="50000">
+              <a:schemeClr val="phClr">
+                <a:lumMod val="105000"/>
+                <a:satMod val="103000"/>
+                <a:tint val="73000"/>
+              </a:schemeClr>
+            </a:gs>
+            <a:gs pos="100000">
+              <a:schemeClr val="phClr">
+                <a:lumMod val="105000"/>
+                <a:satMod val="109000"/>
+                <a:tint val="81000"/>
+              </a:schemeClr>
+            </a:gs>
+          </a:gsLst>
+          <a:lin ang="5400000" scaled="0"/>
+        </a:gradFill>
+        <a:gradFill rotWithShape="1">
+          <a:gsLst>
+            <a:gs pos="0">
+              <a:schemeClr val="phClr">
+                <a:satMod val="103000"/>
+                <a:lumMod val="102000"/>
+                <a:tint val="94000"/>
+              </a:schemeClr>
+            </a:gs>
+            <a:gs pos="50000">
+              <a:schemeClr val="phClr">
+                <a:satMod val="110000"/>
+                <a:lumMod val="100000"/>
+                <a:shade val="100000"/>
+              </a:schemeClr>
+            </a:gs>
+            <a:gs pos="100000">
+              <a:schemeClr val="phClr">
+                <a:lumMod val="99000"/>
+                <a:satMod val="120000"/>
+                <a:shade val="78000"/>
+              </a:schemeClr>
+            </a:gs>
+          </a:gsLst>
+          <a:lin ang="5400000" scaled="0"/>
+        </a:gradFill>
+      </a:fillStyleLst>
+      <a:lnStyleLst>
+        <a:ln w="12700" cap="flat" cmpd="sng" algn="ctr">
+          <a:solidFill>
+            <a:schemeClr val="phClr"/>
+          </a:solidFill>
+          <a:prstDash val="solid"/>
+          <a:miter lim="800000"/>
+        </a:ln>
+        <a:ln w="19050" cap="flat" cmpd="sng" algn="ctr">
+          <a:solidFill>
+            <a:schemeClr val="phClr"/>
+          </a:solidFill>
+          <a:prstDash val="solid"/>
+          <a:miter lim="800000"/>
+        </a:ln>
+        <a:ln w="25400" cap="flat" cmpd="sng" algn="ctr">
+          <a:solidFill>
+            <a:schemeClr val="phClr"/>
+          </a:solidFill>
+          <a:prstDash val="solid"/>
+          <a:miter lim="800000"/>
+        </a:ln>
+      </a:lnStyleLst>
+      <a:effectStyleLst>
+        <a:effectStyle>
+          <a:effectLst/>
+        </a:effectStyle>
+        <a:effectStyle>
+          <a:effectLst/>
+        </a:effectStyle>
+        <a:effectStyle>
+          <a:effectLst>
+            <a:outerShdw blurRad="57150" dist="19050" dir="5400000" algn="ctr" rotWithShape="0">
+              <a:srgbClr val="000000">
+                <a:alpha val="63000"/>
+              </a:srgbClr>
+            </a:outerShdw>
+          </a:effectLst>
+        </a:effectStyle>
+      </a:effectStyleLst>
+      <a:bgFillStyleLst>
+        <a:solidFill>
+          <a:schemeClr val="phClr"/>
+        </a:solidFill>
+        <a:solidFill>
+          <a:schemeClr val="phClr">
+            <a:tint val="95000"/>
+            <a:satMod val="170000"/>
+          </a:schemeClr>
+        </a:solidFill>
+        <a:gradFill rotWithShape="1">
+          <a:gsLst>
+            <a:gs pos="0">
+              <a:schemeClr val="phClr">
+                <a:tint val="93000"/>
+                <a:satMod val="150000"/>
+                <a:shade val="98000"/>
+                <a:lumMod val="102000"/>
+              </a:schemeClr>
+            </a:gs>
+            <a:gs pos="50000">
+              <a:schemeClr val="phClr">
+                <a:tint val="98000"/>
+                <a:satMod val="130000"/>
+                <a:shade val="90000"/>
+                <a:lumMod val="103000"/>
+              </a:schemeClr>
+            </a:gs>
+            <a:gs pos="100000">
+              <a:schemeClr val="phClr">
+                <a:shade val="63000"/>
+                <a:satMod val="120000"/>
+              </a:schemeClr>
+            </a:gs>
+          </a:gsLst>
+          <a:lin ang="5400000" scaled="0"/>
+        </a:gradFill>
+      </a:bgFillStyleLst>
+    </a:fmtScheme>
+  </a:themeElements>
+  <a:objectDefaults>
+    <a:lnDef>
+      <a:spPr/>
+      <a:bodyPr/>
+      <a:lstStyle/>
+      <a:style>
+        <a:lnRef idx="2">
+          <a:schemeClr val="accent1"/>
+        </a:lnRef>
+        <a:fillRef idx="0">
+          <a:schemeClr val="accent1"/>
+        </a:fillRef>
+        <a:effectRef idx="1">
+          <a:schemeClr val="accent1"/>
+        </a:effectRef>
+        <a:fontRef idx="minor">
+          <a:schemeClr val="tx1"/>
+        </a:fontRef>
+      </a:style>
+    </a:lnDef>
+  </a:objectDefaults>
+  <a:extraClrSchemeLst/>
+  <a:extLst>
+    <a:ext uri="{05A4C25C-085E-4340-85A3-A5531E510DB2}">
+      <thm15:themeFamily xmlns:thm15="http://schemas.microsoft.com/office/thememl/2012/main" name="Office Theme" id="{2E142A2C-CD16-42D6-873A-C26D2A0506FA}" vid="{1BDDFF52-6CD6-40A5-AB3C-68EB2F1E4D0A}"/>
+    </a:ext>
+  </a:extLst>
+</a:theme>
 </file>